--- a/videos/machine-learning/03_ridger_regression_gradient_descent/recreated_pptx/slide_014_recreated.pptx
+++ b/videos/machine-learning/03_ridger_regression_gradient_descent/recreated_pptx/slide_014_recreated.pptx
@@ -884,7 +884,7 @@
         <p:spPr>
           <a:xfrm>
             <a:off x="685800" y="571500"/>
-            <a:ext cx="10795000" cy="6286500"/>
+            <a:ext cx="10782300" cy="6286500"/>
           </a:xfrm>
           <a:prstGeom prst="rect">
             <a:avLst/>
@@ -903,19 +903,16 @@
         </p:nvSpPr>
         <p:spPr>
           <a:xfrm>
-            <a:off x="742950" y="584200"/>
-            <a:ext cx="0" cy="6261100"/>
-          </a:xfrm>
-          <a:prstGeom prst="line">
-            <a:avLst/>
-          </a:prstGeom>
-          <a:noFill/>
-          <a:ln w="12700">
-            <a:solidFill>
-              <a:srgbClr val="C00000"/>
-            </a:solidFill>
-            <a:prstDash val="solid"/>
-          </a:ln>
+            <a:off x="742950" y="571500"/>
+            <a:ext cx="12700" cy="6286500"/>
+          </a:xfrm>
+          <a:prstGeom prst="rect">
+            <a:avLst/>
+          </a:prstGeom>
+          <a:solidFill>
+            <a:srgbClr val="C00000"/>
+          </a:solidFill>
+          <a:ln/>
         </p:spPr>
       </p:sp>
       <p:sp>
@@ -926,19 +923,16 @@
         </p:nvSpPr>
         <p:spPr>
           <a:xfrm>
-            <a:off x="11442700" y="584200"/>
-            <a:ext cx="0" cy="6261100"/>
-          </a:xfrm>
-          <a:prstGeom prst="line">
-            <a:avLst/>
-          </a:prstGeom>
-          <a:noFill/>
-          <a:ln w="12700">
-            <a:solidFill>
-              <a:srgbClr val="C00000"/>
-            </a:solidFill>
-            <a:prstDash val="solid"/>
-          </a:ln>
+            <a:off x="11442700" y="571500"/>
+            <a:ext cx="12700" cy="6286500"/>
+          </a:xfrm>
+          <a:prstGeom prst="rect">
+            <a:avLst/>
+          </a:prstGeom>
+          <a:solidFill>
+            <a:srgbClr val="C00000"/>
+          </a:solidFill>
+          <a:ln/>
         </p:spPr>
       </p:sp>
       <p:sp>
@@ -949,19 +943,16 @@
         </p:nvSpPr>
         <p:spPr>
           <a:xfrm>
-            <a:off x="736600" y="6838950"/>
-            <a:ext cx="10718800" cy="0"/>
-          </a:xfrm>
-          <a:prstGeom prst="line">
-            <a:avLst/>
-          </a:prstGeom>
-          <a:noFill/>
-          <a:ln w="12700">
-            <a:solidFill>
-              <a:srgbClr val="C00000"/>
-            </a:solidFill>
-            <a:prstDash val="solid"/>
-          </a:ln>
+            <a:off x="685800" y="6838950"/>
+            <a:ext cx="10782300" cy="12700"/>
+          </a:xfrm>
+          <a:prstGeom prst="rect">
+            <a:avLst/>
+          </a:prstGeom>
+          <a:solidFill>
+            <a:srgbClr val="C00000"/>
+          </a:solidFill>
+          <a:ln/>
         </p:spPr>
       </p:sp>
       <p:sp>
@@ -981,7 +972,7 @@
           <a:solidFill>
             <a:srgbClr val="FDFD96"/>
           </a:solidFill>
-          <a:ln w="25400">
+          <a:ln w="12700">
             <a:solidFill>
               <a:srgbClr val="6A5ACD"/>
             </a:solidFill>
@@ -1036,8 +1027,8 @@
         </p:nvSpPr>
         <p:spPr>
           <a:xfrm>
-            <a:off x="777240" y="685800"/>
-            <a:ext cx="10515600" cy="640080"/>
+            <a:off x="548640" y="777240"/>
+            <a:ext cx="11091672" cy="502920"/>
           </a:xfrm>
           <a:prstGeom prst="rect">
             <a:avLst/>
@@ -1049,14 +1040,14 @@
           <a:bodyPr wrap="square" lIns="0" tIns="0" rIns="0" bIns="0" rtlCol="0" anchor="t"/>
           <a:lstStyle/>
           <a:p>
-            <a:pPr algn="l" indent="0" marL="0">
-              <a:lnSpc>
-                <a:spcPts val="4560"/>
-              </a:lnSpc>
-              <a:buNone/>
-            </a:pPr>
-            <a:r>
-              <a:rPr lang="en-US" sz="3800" b="1" dirty="0">
+            <a:pPr algn="ctr" indent="0" marL="0">
+              <a:lnSpc>
+                <a:spcPts val="3360"/>
+              </a:lnSpc>
+              <a:buNone/>
+            </a:pPr>
+            <a:r>
+              <a:rPr lang="en-US" sz="2800" b="1" dirty="0">
                 <a:solidFill>
                   <a:srgbClr val="0000FF"/>
                 </a:solidFill>
@@ -1066,16 +1057,16 @@
               </a:rPr>
               <a:t>LOSS </a:t>
             </a:r>
-            <a:pPr algn="l" indent="0" marL="0">
-              <a:lnSpc>
-                <a:spcPts val="4560"/>
-              </a:lnSpc>
-              <a:buNone/>
-            </a:pPr>
-            <a:r>
-              <a:rPr lang="en-US" sz="3800" b="1" dirty="0">
-                <a:solidFill>
-                  <a:srgbClr val="000000"/>
+            <a:pPr algn="ctr" indent="0" marL="0">
+              <a:lnSpc>
+                <a:spcPts val="3360"/>
+              </a:lnSpc>
+              <a:buNone/>
+            </a:pPr>
+            <a:r>
+              <a:rPr lang="en-US" sz="2800" b="1" dirty="0">
+                <a:solidFill>
+                  <a:srgbClr val="800020"/>
                 </a:solidFill>
                 <a:latin typeface="Arial" pitchFamily="34" charset="0"/>
                 <a:ea typeface="Arial" pitchFamily="34" charset="-122"/>
@@ -1083,14 +1074,14 @@
               </a:rPr>
               <a:t>Function that </a:t>
             </a:r>
-            <a:pPr algn="l" indent="0" marL="0">
-              <a:lnSpc>
-                <a:spcPts val="4560"/>
-              </a:lnSpc>
-              <a:buNone/>
-            </a:pPr>
-            <a:r>
-              <a:rPr lang="en-US" sz="3800" b="1" dirty="0">
+            <a:pPr algn="ctr" indent="0" marL="0">
+              <a:lnSpc>
+                <a:spcPts val="3360"/>
+              </a:lnSpc>
+              <a:buNone/>
+            </a:pPr>
+            <a:r>
+              <a:rPr lang="en-US" sz="2800" b="1" dirty="0">
                 <a:solidFill>
                   <a:srgbClr val="0000FF"/>
                 </a:solidFill>
@@ -1098,26 +1089,9 @@
                 <a:ea typeface="Arial" pitchFamily="34" charset="-122"/>
                 <a:cs typeface="Arial" pitchFamily="34" charset="-120"/>
               </a:rPr>
-              <a:t>MINIMIZES </a:t>
-            </a:r>
-            <a:pPr algn="l" indent="0" marL="0">
-              <a:lnSpc>
-                <a:spcPts val="4560"/>
-              </a:lnSpc>
-              <a:buNone/>
-            </a:pPr>
-            <a:r>
-              <a:rPr lang="en-US" sz="3800" b="1" dirty="0">
-                <a:solidFill>
-                  <a:srgbClr val="0000FF"/>
-                </a:solidFill>
-                <a:latin typeface="Arial" pitchFamily="34" charset="0"/>
-                <a:ea typeface="Arial" pitchFamily="34" charset="-122"/>
-                <a:cs typeface="Arial" pitchFamily="34" charset="-120"/>
-              </a:rPr>
-              <a:t>Overfitting</a:t>
-            </a:r>
-            <a:endParaRPr lang="en-US" sz="3800" dirty="0"/>
+              <a:t>MINIMIZES Overfitting</a:t>
+            </a:r>
+            <a:endParaRPr lang="en-US" sz="2800" dirty="0"/>
           </a:p>
         </p:txBody>
       </p:sp>
@@ -1129,8 +1103,8 @@
         </p:nvSpPr>
         <p:spPr>
           <a:xfrm>
-            <a:off x="685800" y="1320800"/>
-            <a:ext cx="5029200" cy="1625600"/>
+            <a:off x="1016000" y="1257300"/>
+            <a:ext cx="4495800" cy="1778000"/>
           </a:xfrm>
           <a:prstGeom prst="rect">
             <a:avLst/>
@@ -1138,9 +1112,9 @@
           <a:solidFill>
             <a:srgbClr val="FFFFFF"/>
           </a:solidFill>
-          <a:ln w="12700">
+          <a:ln w="25400">
             <a:solidFill>
-              <a:srgbClr val="000000"/>
+              <a:srgbClr val="8F1220"/>
             </a:solidFill>
             <a:prstDash val="solid"/>
           </a:ln>
@@ -1154,8 +1128,8 @@
         </p:nvSpPr>
         <p:spPr>
           <a:xfrm>
-            <a:off x="6350000" y="1320800"/>
-            <a:ext cx="5029200" cy="1625600"/>
+            <a:off x="5803900" y="1257300"/>
+            <a:ext cx="4483100" cy="1778000"/>
           </a:xfrm>
           <a:prstGeom prst="rect">
             <a:avLst/>
@@ -1163,9 +1137,9 @@
           <a:solidFill>
             <a:srgbClr val="FFFFFF"/>
           </a:solidFill>
-          <a:ln w="12700">
+          <a:ln w="25400">
             <a:solidFill>
-              <a:srgbClr val="000000"/>
+              <a:srgbClr val="8F1220"/>
             </a:solidFill>
             <a:prstDash val="solid"/>
           </a:ln>
@@ -1179,8 +1153,152 @@
         </p:nvSpPr>
         <p:spPr>
           <a:xfrm>
-            <a:off x="822960" y="1412240"/>
-            <a:ext cx="4754880" cy="1442720"/>
+            <a:off x="1153160" y="1257300"/>
+            <a:ext cx="822960" cy="1778000"/>
+          </a:xfrm>
+          <a:prstGeom prst="rect">
+            <a:avLst/>
+          </a:prstGeom>
+          <a:noFill/>
+          <a:ln/>
+        </p:spPr>
+        <p:txBody>
+          <a:bodyPr wrap="square" lIns="0" tIns="0" rIns="0" bIns="0" rtlCol="0" anchor="ctr"/>
+          <a:lstStyle/>
+          <a:p>
+            <a:pPr algn="l" indent="0" marL="0">
+              <a:buNone/>
+            </a:pPr>
+            <a:r>
+              <a:rPr lang="en-US" sz="1800" dirty="0">
+                <a:solidFill>
+                  <a:srgbClr val="000000"/>
+                </a:solidFill>
+                <a:latin typeface="Arial" pitchFamily="34" charset="0"/>
+                <a:ea typeface="Arial" pitchFamily="34" charset="-122"/>
+                <a:cs typeface="Arial" pitchFamily="34" charset="-120"/>
+              </a:rPr>
+              <a:t>Let </a:t>
+            </a:r>
+            <a:pPr algn="l" indent="0" marL="0">
+              <a:buNone/>
+            </a:pPr>
+            <a:r>
+              <a:rPr lang="en-US" sz="1800" u="sng" dirty="0">
+                <a:solidFill>
+                  <a:srgbClr val="000000"/>
+                </a:solidFill>
+                <a:latin typeface="Arial" pitchFamily="34" charset="0"/>
+                <a:ea typeface="Arial" pitchFamily="34" charset="-122"/>
+                <a:cs typeface="Arial" pitchFamily="34" charset="-120"/>
+              </a:rPr>
+              <a:t>Y</a:t>
+            </a:r>
+            <a:pPr algn="l" indent="0" marL="0">
+              <a:buNone/>
+            </a:pPr>
+            <a:r>
+              <a:rPr lang="en-US" sz="1800" dirty="0">
+                <a:solidFill>
+                  <a:srgbClr val="000000"/>
+                </a:solidFill>
+                <a:latin typeface="Arial" pitchFamily="34" charset="0"/>
+                <a:ea typeface="Arial" pitchFamily="34" charset="-122"/>
+                <a:cs typeface="Arial" pitchFamily="34" charset="-120"/>
+              </a:rPr>
+              <a:t> =</a:t>
+            </a:r>
+            <a:endParaRPr lang="en-US" sz="1800" dirty="0"/>
+          </a:p>
+        </p:txBody>
+      </p:sp>
+      <p:pic>
+        <p:nvPicPr>
+          <p:cNvPr id="12" name="Image 0" descr="videos/machine-learning/03_ridger_regression_gradient_descent/recreated_pptx/build/assets/eq_014_Yvec.png">    </p:cNvPr>
+          <p:cNvPicPr>
+            <a:picLocks noChangeAspect="1"/>
+          </p:cNvPicPr>
+          <p:nvPr/>
+        </p:nvPicPr>
+        <p:blipFill>
+          <a:blip r:embed="rId1"/>
+          <a:stretch>
+            <a:fillRect/>
+          </a:stretch>
+        </p:blipFill>
+        <p:spPr>
+          <a:xfrm>
+            <a:off x="1976120" y="1593865"/>
+            <a:ext cx="958566" cy="1104870"/>
+          </a:xfrm>
+          <a:prstGeom prst="rect">
+            <a:avLst/>
+          </a:prstGeom>
+        </p:spPr>
+      </p:pic>
+      <p:sp>
+        <p:nvSpPr>
+          <p:cNvPr id="13" name="Text 10"/>
+          <p:cNvSpPr/>
+          <p:nvPr/>
+        </p:nvSpPr>
+        <p:spPr>
+          <a:xfrm>
+            <a:off x="2981960" y="1593865"/>
+            <a:ext cx="640080" cy="1104870"/>
+          </a:xfrm>
+          <a:prstGeom prst="rect">
+            <a:avLst/>
+          </a:prstGeom>
+          <a:noFill/>
+          <a:ln/>
+        </p:spPr>
+        <p:txBody>
+          <a:bodyPr wrap="square" lIns="0" tIns="0" rIns="0" bIns="0" rtlCol="0" anchor="b"/>
+          <a:lstStyle/>
+          <a:p>
+            <a:pPr algn="l" indent="0" marL="0">
+              <a:buNone/>
+            </a:pPr>
+            <a:r>
+              <a:rPr lang="en-US" sz="1200" dirty="0">
+                <a:solidFill>
+                  <a:srgbClr val="000000"/>
+                </a:solidFill>
+                <a:latin typeface="Arial" pitchFamily="34" charset="0"/>
+                <a:ea typeface="Arial" pitchFamily="34" charset="-122"/>
+                <a:cs typeface="Arial" pitchFamily="34" charset="-120"/>
+              </a:rPr>
+              <a:t>N</a:t>
+            </a:r>
+            <a:pPr algn="l" indent="0" marL="0">
+              <a:buNone/>
+            </a:pPr>
+            <a:r>
+              <a:rPr lang="en-US" sz="1200" baseline="-40000" dirty="0">
+                <a:solidFill>
+                  <a:srgbClr val="000000"/>
+                </a:solidFill>
+                <a:latin typeface="Arial" pitchFamily="34" charset="0"/>
+                <a:ea typeface="Arial" pitchFamily="34" charset="-122"/>
+                <a:cs typeface="Arial" pitchFamily="34" charset="-120"/>
+              </a:rPr>
+              <a:t>×1</a:t>
+            </a:r>
+            <a:endParaRPr lang="en-US" sz="1200" dirty="0"/>
+          </a:p>
+        </p:txBody>
+      </p:sp>
+      <p:sp>
+        <p:nvSpPr>
+          <p:cNvPr id="14" name="Text 11"/>
+          <p:cNvSpPr/>
+          <p:nvPr/>
+        </p:nvSpPr>
+        <p:spPr>
+          <a:xfrm>
+            <a:off x="3393440" y="1531620"/>
+            <a:ext cx="2026920" cy="256032"/>
           </a:xfrm>
           <a:prstGeom prst="rect">
             <a:avLst/>
@@ -1194,31 +1312,14 @@
           <a:p>
             <a:pPr algn="l" indent="0" marL="0">
               <a:lnSpc>
-                <a:spcPts val="1920"/>
-              </a:lnSpc>
-              <a:buNone/>
-            </a:pPr>
-            <a:r>
-              <a:rPr lang="en-US" sz="1600" b="1" i="1" dirty="0">
-                <a:solidFill>
-                  <a:srgbClr val="000000"/>
-                </a:solidFill>
-                <a:latin typeface="Arial" pitchFamily="34" charset="0"/>
-                <a:ea typeface="Arial" pitchFamily="34" charset="-122"/>
-                <a:cs typeface="Arial" pitchFamily="34" charset="-120"/>
-              </a:rPr>
-              <a:t>Let Y = [y1; y2; ...; yn] Nx1</a:t>
-            </a:r>
-            <a:pPr algn="l" indent="0" marL="0">
-              <a:lnSpc>
-                <a:spcPts val="1920"/>
-              </a:lnSpc>
-              <a:buNone/>
-            </a:pPr>
-            <a:r>
-              <a:rPr lang="en-US" sz="1600" b="1" dirty="0">
-                <a:solidFill>
-                  <a:srgbClr val="000000"/>
+                <a:spcPts val="1700"/>
+              </a:lnSpc>
+              <a:buNone/>
+            </a:pPr>
+            <a:r>
+              <a:rPr lang="en-US" sz="1400" b="1" dirty="0">
+                <a:solidFill>
+                  <a:srgbClr val="AD0014"/>
                 </a:solidFill>
                 <a:latin typeface="Arial" pitchFamily="34" charset="0"/>
                 <a:ea typeface="Arial" pitchFamily="34" charset="-122"/>
@@ -1226,37 +1327,20 @@
               </a:rPr>
               <a:t>Original Labels</a:t>
             </a:r>
-            <a:pPr algn="l" indent="0" marL="0">
-              <a:lnSpc>
-                <a:spcPts val="1920"/>
-              </a:lnSpc>
-              <a:buNone/>
-            </a:pPr>
-            <a:r>
-              <a:rPr lang="en-US" sz="1600" dirty="0">
-                <a:solidFill>
-                  <a:srgbClr val="000000"/>
-                </a:solidFill>
-                <a:latin typeface="Arial" pitchFamily="34" charset="0"/>
-                <a:ea typeface="Arial" pitchFamily="34" charset="-122"/>
-                <a:cs typeface="Arial" pitchFamily="34" charset="-120"/>
-              </a:rPr>
-              <a:t>from Training Samples</a:t>
-            </a:r>
-            <a:endParaRPr lang="en-US" sz="1600" dirty="0"/>
+            <a:endParaRPr lang="en-US" sz="1400" dirty="0"/>
           </a:p>
         </p:txBody>
       </p:sp>
       <p:sp>
         <p:nvSpPr>
-          <p:cNvPr id="12" name="Text 10"/>
-          <p:cNvSpPr/>
-          <p:nvPr/>
-        </p:nvSpPr>
-        <p:spPr>
-          <a:xfrm>
-            <a:off x="6487160" y="1412240"/>
-            <a:ext cx="4754880" cy="1442720"/>
+          <p:cNvPr id="15" name="Text 12"/>
+          <p:cNvSpPr/>
+          <p:nvPr/>
+        </p:nvSpPr>
+        <p:spPr>
+          <a:xfrm>
+            <a:off x="3393440" y="1824228"/>
+            <a:ext cx="2026920" cy="256032"/>
           </a:xfrm>
           <a:prstGeom prst="rect">
             <a:avLst/>
@@ -1270,89 +1354,179 @@
           <a:p>
             <a:pPr algn="l" indent="0" marL="0">
               <a:lnSpc>
-                <a:spcPts val="1920"/>
-              </a:lnSpc>
-              <a:buNone/>
-            </a:pPr>
-            <a:r>
-              <a:rPr lang="en-US" sz="1600" b="1" i="1" dirty="0">
-                <a:solidFill>
-                  <a:srgbClr val="000000"/>
-                </a:solidFill>
-                <a:latin typeface="Arial" pitchFamily="34" charset="0"/>
-                <a:ea typeface="Arial" pitchFamily="34" charset="-122"/>
-                <a:cs typeface="Arial" pitchFamily="34" charset="-120"/>
-              </a:rPr>
-              <a:t>Let Ŷ = [ŷ1; ŷ2; ...; ŷn] Nx1</a:t>
-            </a:r>
-            <a:pPr algn="l" indent="0" marL="0">
-              <a:lnSpc>
-                <a:spcPts val="1920"/>
-              </a:lnSpc>
-              <a:buNone/>
-            </a:pPr>
-            <a:r>
-              <a:rPr lang="en-US" sz="1600" b="1" dirty="0">
-                <a:solidFill>
-                  <a:srgbClr val="000000"/>
-                </a:solidFill>
-                <a:latin typeface="Arial" pitchFamily="34" charset="0"/>
-                <a:ea typeface="Arial" pitchFamily="34" charset="-122"/>
-                <a:cs typeface="Arial" pitchFamily="34" charset="-120"/>
-              </a:rPr>
-              <a:t>Predicted Labels</a:t>
-            </a:r>
-            <a:pPr algn="l" indent="0" marL="0">
-              <a:lnSpc>
-                <a:spcPts val="1920"/>
-              </a:lnSpc>
-              <a:buNone/>
-            </a:pPr>
-            <a:r>
-              <a:rPr lang="en-US" sz="1600" dirty="0">
-                <a:solidFill>
-                  <a:srgbClr val="000000"/>
-                </a:solidFill>
-                <a:latin typeface="Arial" pitchFamily="34" charset="0"/>
-                <a:ea typeface="Arial" pitchFamily="34" charset="-122"/>
-                <a:cs typeface="Arial" pitchFamily="34" charset="-120"/>
-              </a:rPr>
-              <a:t>from Model Ŷ = XW</a:t>
-            </a:r>
-            <a:endParaRPr lang="en-US" sz="1600" dirty="0"/>
+                <a:spcPts val="1700"/>
+              </a:lnSpc>
+              <a:buNone/>
+            </a:pPr>
+            <a:r>
+              <a:rPr lang="en-US" sz="1400" dirty="0">
+                <a:solidFill>
+                  <a:srgbClr val="000000"/>
+                </a:solidFill>
+                <a:latin typeface="Arial" pitchFamily="34" charset="0"/>
+                <a:ea typeface="Arial" pitchFamily="34" charset="-122"/>
+                <a:cs typeface="Arial" pitchFamily="34" charset="-120"/>
+              </a:rPr>
+              <a:t>from Training Samples</a:t>
+            </a:r>
+            <a:endParaRPr lang="en-US" sz="1400" dirty="0"/>
           </a:p>
         </p:txBody>
       </p:sp>
       <p:sp>
         <p:nvSpPr>
-          <p:cNvPr id="13" name="Shape 11"/>
-          <p:cNvSpPr/>
-          <p:nvPr/>
-        </p:nvSpPr>
-        <p:spPr>
-          <a:xfrm>
-            <a:off x="685800" y="3175000"/>
-            <a:ext cx="10795000" cy="355600"/>
-          </a:xfrm>
-          <a:prstGeom prst="rect">
-            <a:avLst/>
-          </a:prstGeom>
-          <a:solidFill>
-            <a:srgbClr val="FFF9C4"/>
-          </a:solidFill>
+          <p:cNvPr id="16" name="Text 13"/>
+          <p:cNvSpPr/>
+          <p:nvPr/>
+        </p:nvSpPr>
+        <p:spPr>
+          <a:xfrm>
+            <a:off x="5941060" y="1257300"/>
+            <a:ext cx="822960" cy="1778000"/>
+          </a:xfrm>
+          <a:prstGeom prst="rect">
+            <a:avLst/>
+          </a:prstGeom>
+          <a:noFill/>
           <a:ln/>
         </p:spPr>
-      </p:sp>
-      <p:sp>
-        <p:nvSpPr>
-          <p:cNvPr id="14" name="Text 12"/>
-          <p:cNvSpPr/>
-          <p:nvPr/>
-        </p:nvSpPr>
-        <p:spPr>
-          <a:xfrm>
-            <a:off x="868680" y="3193288"/>
-            <a:ext cx="10429240" cy="319024"/>
+        <p:txBody>
+          <a:bodyPr wrap="square" lIns="0" tIns="0" rIns="0" bIns="0" rtlCol="0" anchor="ctr"/>
+          <a:lstStyle/>
+          <a:p>
+            <a:pPr algn="l" indent="0" marL="0">
+              <a:buNone/>
+            </a:pPr>
+            <a:r>
+              <a:rPr lang="en-US" sz="1800" dirty="0">
+                <a:solidFill>
+                  <a:srgbClr val="000000"/>
+                </a:solidFill>
+                <a:latin typeface="Arial" pitchFamily="34" charset="0"/>
+                <a:ea typeface="Arial" pitchFamily="34" charset="-122"/>
+                <a:cs typeface="Arial" pitchFamily="34" charset="-120"/>
+              </a:rPr>
+              <a:t>Let </a:t>
+            </a:r>
+            <a:pPr algn="l" indent="0" marL="0">
+              <a:buNone/>
+            </a:pPr>
+            <a:r>
+              <a:rPr lang="en-US" sz="1800" dirty="0">
+                <a:solidFill>
+                  <a:srgbClr val="000000"/>
+                </a:solidFill>
+                <a:latin typeface="Arial" pitchFamily="34" charset="0"/>
+                <a:ea typeface="Arial" pitchFamily="34" charset="-122"/>
+                <a:cs typeface="Arial" pitchFamily="34" charset="-120"/>
+              </a:rPr>
+              <a:t>Ŷ</a:t>
+            </a:r>
+            <a:pPr algn="l" indent="0" marL="0">
+              <a:buNone/>
+            </a:pPr>
+            <a:r>
+              <a:rPr lang="en-US" sz="1800" dirty="0">
+                <a:solidFill>
+                  <a:srgbClr val="000000"/>
+                </a:solidFill>
+                <a:latin typeface="Arial" pitchFamily="34" charset="0"/>
+                <a:ea typeface="Arial" pitchFamily="34" charset="-122"/>
+                <a:cs typeface="Arial" pitchFamily="34" charset="-120"/>
+              </a:rPr>
+              <a:t> =</a:t>
+            </a:r>
+            <a:endParaRPr lang="en-US" sz="1800" dirty="0"/>
+          </a:p>
+        </p:txBody>
+      </p:sp>
+      <p:pic>
+        <p:nvPicPr>
+          <p:cNvPr id="17" name="Image 1" descr="videos/machine-learning/03_ridger_regression_gradient_descent/recreated_pptx/build/assets/eq_014_Yhatvec.png">    </p:cNvPr>
+          <p:cNvPicPr>
+            <a:picLocks noChangeAspect="1"/>
+          </p:cNvPicPr>
+          <p:nvPr/>
+        </p:nvPicPr>
+        <p:blipFill>
+          <a:blip r:embed="rId2"/>
+          <a:stretch>
+            <a:fillRect/>
+          </a:stretch>
+        </p:blipFill>
+        <p:spPr>
+          <a:xfrm>
+            <a:off x="6764020" y="1588516"/>
+            <a:ext cx="958566" cy="1115568"/>
+          </a:xfrm>
+          <a:prstGeom prst="rect">
+            <a:avLst/>
+          </a:prstGeom>
+        </p:spPr>
+      </p:pic>
+      <p:sp>
+        <p:nvSpPr>
+          <p:cNvPr id="18" name="Text 14"/>
+          <p:cNvSpPr/>
+          <p:nvPr/>
+        </p:nvSpPr>
+        <p:spPr>
+          <a:xfrm>
+            <a:off x="7769860" y="1588516"/>
+            <a:ext cx="640080" cy="1115568"/>
+          </a:xfrm>
+          <a:prstGeom prst="rect">
+            <a:avLst/>
+          </a:prstGeom>
+          <a:noFill/>
+          <a:ln/>
+        </p:spPr>
+        <p:txBody>
+          <a:bodyPr wrap="square" lIns="0" tIns="0" rIns="0" bIns="0" rtlCol="0" anchor="b"/>
+          <a:lstStyle/>
+          <a:p>
+            <a:pPr algn="l" indent="0" marL="0">
+              <a:buNone/>
+            </a:pPr>
+            <a:r>
+              <a:rPr lang="en-US" sz="1200" dirty="0">
+                <a:solidFill>
+                  <a:srgbClr val="000000"/>
+                </a:solidFill>
+                <a:latin typeface="Arial" pitchFamily="34" charset="0"/>
+                <a:ea typeface="Arial" pitchFamily="34" charset="-122"/>
+                <a:cs typeface="Arial" pitchFamily="34" charset="-120"/>
+              </a:rPr>
+              <a:t>N</a:t>
+            </a:r>
+            <a:pPr algn="l" indent="0" marL="0">
+              <a:buNone/>
+            </a:pPr>
+            <a:r>
+              <a:rPr lang="en-US" sz="1200" baseline="-40000" dirty="0">
+                <a:solidFill>
+                  <a:srgbClr val="000000"/>
+                </a:solidFill>
+                <a:latin typeface="Arial" pitchFamily="34" charset="0"/>
+                <a:ea typeface="Arial" pitchFamily="34" charset="-122"/>
+                <a:cs typeface="Arial" pitchFamily="34" charset="-120"/>
+              </a:rPr>
+              <a:t>×1</a:t>
+            </a:r>
+            <a:endParaRPr lang="en-US" sz="1200" dirty="0"/>
+          </a:p>
+        </p:txBody>
+      </p:sp>
+      <p:sp>
+        <p:nvSpPr>
+          <p:cNvPr id="19" name="Text 15"/>
+          <p:cNvSpPr/>
+          <p:nvPr/>
+        </p:nvSpPr>
+        <p:spPr>
+          <a:xfrm>
+            <a:off x="8181340" y="1531620"/>
+            <a:ext cx="2014220" cy="256032"/>
           </a:xfrm>
           <a:prstGeom prst="rect">
             <a:avLst/>
@@ -1366,29 +1540,12 @@
           <a:p>
             <a:pPr algn="l" indent="0" marL="0">
               <a:lnSpc>
-                <a:spcPts val="1920"/>
-              </a:lnSpc>
-              <a:buNone/>
-            </a:pPr>
-            <a:r>
-              <a:rPr lang="en-US" sz="1600" dirty="0">
-                <a:solidFill>
-                  <a:srgbClr val="000000"/>
-                </a:solidFill>
-                <a:latin typeface="Arial" pitchFamily="34" charset="0"/>
-                <a:ea typeface="Arial" pitchFamily="34" charset="-122"/>
-                <a:cs typeface="Arial" pitchFamily="34" charset="-120"/>
-              </a:rPr>
-              <a:t>Objective is </a:t>
-            </a:r>
-            <a:pPr algn="l" indent="0" marL="0">
-              <a:lnSpc>
-                <a:spcPts val="1920"/>
-              </a:lnSpc>
-              <a:buNone/>
-            </a:pPr>
-            <a:r>
-              <a:rPr lang="en-US" sz="1600" b="1" dirty="0">
+                <a:spcPts val="1700"/>
+              </a:lnSpc>
+              <a:buNone/>
+            </a:pPr>
+            <a:r>
+              <a:rPr lang="en-US" sz="1400" b="1" dirty="0">
                 <a:solidFill>
                   <a:srgbClr val="0000FF"/>
                 </a:solidFill>
@@ -1396,73 +1553,22 @@
                 <a:ea typeface="Arial" pitchFamily="34" charset="-122"/>
                 <a:cs typeface="Arial" pitchFamily="34" charset="-120"/>
               </a:rPr>
-              <a:t>Ŷ=Y</a:t>
-            </a:r>
-            <a:pPr algn="l" indent="0" marL="0">
-              <a:lnSpc>
-                <a:spcPts val="1920"/>
-              </a:lnSpc>
-              <a:buNone/>
-            </a:pPr>
-            <a:r>
-              <a:rPr lang="en-US" sz="1600" dirty="0">
-                <a:solidFill>
-                  <a:srgbClr val="000000"/>
-                </a:solidFill>
-                <a:latin typeface="Arial" pitchFamily="34" charset="0"/>
-                <a:ea typeface="Arial" pitchFamily="34" charset="-122"/>
-                <a:cs typeface="Arial" pitchFamily="34" charset="-120"/>
-              </a:rPr>
-              <a:t> and </a:t>
-            </a:r>
-            <a:pPr algn="l" indent="0" marL="0">
-              <a:lnSpc>
-                <a:spcPts val="1920"/>
-              </a:lnSpc>
-              <a:buNone/>
-            </a:pPr>
-            <a:r>
-              <a:rPr lang="en-US" sz="1600" b="1" dirty="0">
-                <a:solidFill>
-                  <a:srgbClr val="0000FF"/>
-                </a:solidFill>
-                <a:latin typeface="Arial" pitchFamily="34" charset="0"/>
-                <a:ea typeface="Arial" pitchFamily="34" charset="-122"/>
-                <a:cs typeface="Arial" pitchFamily="34" charset="-120"/>
-              </a:rPr>
-              <a:t>||W||</a:t>
-            </a:r>
-            <a:pPr algn="l" indent="0" marL="0">
-              <a:lnSpc>
-                <a:spcPts val="1920"/>
-              </a:lnSpc>
-              <a:buNone/>
-            </a:pPr>
-            <a:r>
-              <a:rPr lang="en-US" sz="1600" dirty="0">
-                <a:solidFill>
-                  <a:srgbClr val="000000"/>
-                </a:solidFill>
-                <a:latin typeface="Arial" pitchFamily="34" charset="0"/>
-                <a:ea typeface="Arial" pitchFamily="34" charset="-122"/>
-                <a:cs typeface="Arial" pitchFamily="34" charset="-120"/>
-              </a:rPr>
-              <a:t> is minimum</a:t>
-            </a:r>
-            <a:endParaRPr lang="en-US" sz="1600" dirty="0"/>
+              <a:t>Predicted Labels</a:t>
+            </a:r>
+            <a:endParaRPr lang="en-US" sz="1400" dirty="0"/>
           </a:p>
         </p:txBody>
       </p:sp>
       <p:sp>
         <p:nvSpPr>
-          <p:cNvPr id="15" name="Text 13"/>
-          <p:cNvSpPr/>
-          <p:nvPr/>
-        </p:nvSpPr>
-        <p:spPr>
-          <a:xfrm>
-            <a:off x="868680" y="3352800"/>
-            <a:ext cx="10429240" cy="177800"/>
+          <p:cNvPr id="20" name="Text 16"/>
+          <p:cNvSpPr/>
+          <p:nvPr/>
+        </p:nvSpPr>
+        <p:spPr>
+          <a:xfrm>
+            <a:off x="8181340" y="1824228"/>
+            <a:ext cx="2014220" cy="256032"/>
           </a:xfrm>
           <a:prstGeom prst="rect">
             <a:avLst/>
@@ -1476,125 +1582,46 @@
           <a:p>
             <a:pPr algn="l" indent="0" marL="0">
               <a:lnSpc>
-                <a:spcPts val="1920"/>
-              </a:lnSpc>
-              <a:buNone/>
-            </a:pPr>
-            <a:r>
-              <a:rPr lang="en-US" sz="1600" dirty="0">
-                <a:solidFill>
-                  <a:srgbClr val="000000"/>
-                </a:solidFill>
-                <a:latin typeface="Arial" pitchFamily="34" charset="0"/>
-                <a:ea typeface="Arial" pitchFamily="34" charset="-122"/>
-                <a:cs typeface="Arial" pitchFamily="34" charset="-120"/>
-              </a:rPr>
-              <a:t>This is called </a:t>
-            </a:r>
-            <a:pPr algn="l" indent="0" marL="0">
-              <a:lnSpc>
-                <a:spcPts val="1920"/>
-              </a:lnSpc>
-              <a:buNone/>
-            </a:pPr>
-            <a:r>
-              <a:rPr lang="en-US" sz="1600" b="1" dirty="0">
-                <a:solidFill>
-                  <a:srgbClr val="008000"/>
-                </a:solidFill>
-                <a:latin typeface="Arial" pitchFamily="34" charset="0"/>
-                <a:ea typeface="Arial" pitchFamily="34" charset="-122"/>
-                <a:cs typeface="Arial" pitchFamily="34" charset="-120"/>
-              </a:rPr>
-              <a:t>Ridge Regularization</a:t>
-            </a:r>
-            <a:endParaRPr lang="en-US" sz="1600" dirty="0"/>
-          </a:p>
-        </p:txBody>
-      </p:sp>
-      <p:sp>
-        <p:nvSpPr>
-          <p:cNvPr id="16" name="Shape 14"/>
-          <p:cNvSpPr/>
-          <p:nvPr/>
-        </p:nvSpPr>
-        <p:spPr>
-          <a:xfrm>
-            <a:off x="685800" y="3937000"/>
-            <a:ext cx="10795000" cy="304800"/>
-          </a:xfrm>
-          <a:prstGeom prst="rect">
-            <a:avLst/>
-          </a:prstGeom>
-          <a:solidFill>
-            <a:srgbClr val="FFF9C4"/>
-          </a:solidFill>
-          <a:ln/>
-        </p:spPr>
-      </p:sp>
-      <p:sp>
-        <p:nvSpPr>
-          <p:cNvPr id="17" name="Text 15"/>
-          <p:cNvSpPr/>
-          <p:nvPr/>
-        </p:nvSpPr>
-        <p:spPr>
-          <a:xfrm>
-            <a:off x="868680" y="3955288"/>
-            <a:ext cx="10429240" cy="268224"/>
-          </a:xfrm>
-          <a:prstGeom prst="rect">
-            <a:avLst/>
-          </a:prstGeom>
-          <a:noFill/>
-          <a:ln/>
-        </p:spPr>
-        <p:txBody>
-          <a:bodyPr wrap="square" lIns="0" tIns="0" rIns="0" bIns="0" rtlCol="0" anchor="t"/>
-          <a:lstStyle/>
-          <a:p>
-            <a:pPr algn="l" indent="0" marL="0">
-              <a:lnSpc>
-                <a:spcPts val="1920"/>
-              </a:lnSpc>
-              <a:buNone/>
-            </a:pPr>
-            <a:r>
-              <a:rPr lang="en-US" sz="1600" dirty="0">
-                <a:solidFill>
-                  <a:srgbClr val="000000"/>
-                </a:solidFill>
-                <a:latin typeface="Arial" pitchFamily="34" charset="0"/>
-                <a:ea typeface="Arial" pitchFamily="34" charset="-122"/>
-                <a:cs typeface="Arial" pitchFamily="34" charset="-120"/>
-              </a:rPr>
-              <a:t>Objective function </a:t>
-            </a:r>
-            <a:pPr algn="l" indent="0" marL="0">
-              <a:lnSpc>
-                <a:spcPts val="1920"/>
-              </a:lnSpc>
-              <a:buNone/>
-            </a:pPr>
-            <a:r>
-              <a:rPr lang="en-US" sz="1600" b="1" dirty="0">
-                <a:solidFill>
-                  <a:srgbClr val="0000FF"/>
-                </a:solidFill>
-                <a:latin typeface="Arial" pitchFamily="34" charset="0"/>
-                <a:ea typeface="Arial" pitchFamily="34" charset="-122"/>
-                <a:cs typeface="Arial" pitchFamily="34" charset="-120"/>
-              </a:rPr>
-              <a:t>J(W)</a:t>
-            </a:r>
-            <a:pPr algn="l" indent="0" marL="0">
-              <a:lnSpc>
-                <a:spcPts val="1920"/>
-              </a:lnSpc>
-              <a:buNone/>
-            </a:pPr>
-            <a:r>
-              <a:rPr lang="en-US" sz="1600" dirty="0">
+                <a:spcPts val="1700"/>
+              </a:lnSpc>
+              <a:buNone/>
+            </a:pPr>
+            <a:r>
+              <a:rPr lang="en-US" sz="1400" dirty="0">
+                <a:solidFill>
+                  <a:srgbClr val="000000"/>
+                </a:solidFill>
+                <a:latin typeface="Arial" pitchFamily="34" charset="0"/>
+                <a:ea typeface="Arial" pitchFamily="34" charset="-122"/>
+                <a:cs typeface="Arial" pitchFamily="34" charset="-120"/>
+              </a:rPr>
+              <a:t>from Model </a:t>
+            </a:r>
+            <a:pPr algn="l" indent="0" marL="0">
+              <a:lnSpc>
+                <a:spcPts val="1700"/>
+              </a:lnSpc>
+              <a:buNone/>
+            </a:pPr>
+            <a:r>
+              <a:rPr lang="en-US" sz="1400" dirty="0">
+                <a:solidFill>
+                  <a:srgbClr val="000000"/>
+                </a:solidFill>
+                <a:latin typeface="Arial" pitchFamily="34" charset="0"/>
+                <a:ea typeface="Arial" pitchFamily="34" charset="-122"/>
+                <a:cs typeface="Arial" pitchFamily="34" charset="-120"/>
+              </a:rPr>
+              <a:t>Ŷ</a:t>
+            </a:r>
+            <a:pPr algn="l" indent="0" marL="0">
+              <a:lnSpc>
+                <a:spcPts val="1700"/>
+              </a:lnSpc>
+              <a:buNone/>
+            </a:pPr>
+            <a:r>
+              <a:rPr lang="en-US" sz="1400" dirty="0">
                 <a:solidFill>
                   <a:srgbClr val="000000"/>
                 </a:solidFill>
@@ -1606,63 +1633,29 @@
             </a:r>
             <a:pPr algn="l" indent="0" marL="0">
               <a:lnSpc>
-                <a:spcPts val="1920"/>
-              </a:lnSpc>
-              <a:buNone/>
-            </a:pPr>
-            <a:r>
-              <a:rPr lang="en-US" sz="1600" b="1" dirty="0">
-                <a:solidFill>
-                  <a:srgbClr val="FF0000"/>
-                </a:solidFill>
-                <a:latin typeface="Arial" pitchFamily="34" charset="0"/>
-                <a:ea typeface="Arial" pitchFamily="34" charset="-122"/>
-                <a:cs typeface="Arial" pitchFamily="34" charset="-120"/>
-              </a:rPr>
-              <a:t>Loss</a:t>
-            </a:r>
-            <a:pPr algn="l" indent="0" marL="0">
-              <a:lnSpc>
-                <a:spcPts val="1920"/>
-              </a:lnSpc>
-              <a:buNone/>
-            </a:pPr>
-            <a:r>
-              <a:rPr lang="en-US" sz="1600" dirty="0">
-                <a:solidFill>
-                  <a:srgbClr val="000000"/>
-                </a:solidFill>
-                <a:latin typeface="Arial" pitchFamily="34" charset="0"/>
-                <a:ea typeface="Arial" pitchFamily="34" charset="-122"/>
-                <a:cs typeface="Arial" pitchFamily="34" charset="-120"/>
-              </a:rPr>
-              <a:t>(X,Y,W) + </a:t>
-            </a:r>
-            <a:pPr algn="l" indent="0" marL="0">
-              <a:lnSpc>
-                <a:spcPts val="1920"/>
-              </a:lnSpc>
-              <a:buNone/>
-            </a:pPr>
-            <a:r>
-              <a:rPr lang="en-US" sz="1600" dirty="0">
-                <a:solidFill>
-                  <a:srgbClr val="0000FF"/>
-                </a:solidFill>
-                <a:latin typeface="Arial" pitchFamily="34" charset="0"/>
-                <a:ea typeface="Arial" pitchFamily="34" charset="-122"/>
-                <a:cs typeface="Arial" pitchFamily="34" charset="-120"/>
-              </a:rPr>
-              <a:t>λ</a:t>
-            </a:r>
-            <a:pPr algn="l" indent="0" marL="0">
-              <a:lnSpc>
-                <a:spcPts val="1920"/>
-              </a:lnSpc>
-              <a:buNone/>
-            </a:pPr>
-            <a:r>
-              <a:rPr lang="en-US" sz="1600" dirty="0">
+                <a:spcPts val="1700"/>
+              </a:lnSpc>
+              <a:buNone/>
+            </a:pPr>
+            <a:r>
+              <a:rPr lang="en-US" sz="1400" b="1" u="sng" dirty="0">
+                <a:solidFill>
+                  <a:srgbClr val="000000"/>
+                </a:solidFill>
+                <a:latin typeface="Arial" pitchFamily="34" charset="0"/>
+                <a:ea typeface="Arial" pitchFamily="34" charset="-122"/>
+                <a:cs typeface="Arial" pitchFamily="34" charset="-120"/>
+              </a:rPr>
+              <a:t>X</a:t>
+            </a:r>
+            <a:pPr algn="l" indent="0" marL="0">
+              <a:lnSpc>
+                <a:spcPts val="1700"/>
+              </a:lnSpc>
+              <a:buNone/>
+            </a:pPr>
+            <a:r>
+              <a:rPr lang="en-US" sz="1400" dirty="0">
                 <a:solidFill>
                   <a:srgbClr val="000000"/>
                 </a:solidFill>
@@ -1674,545 +1667,1174 @@
             </a:r>
             <a:pPr algn="l" indent="0" marL="0">
               <a:lnSpc>
-                <a:spcPts val="1920"/>
-              </a:lnSpc>
-              <a:buNone/>
-            </a:pPr>
-            <a:r>
-              <a:rPr lang="en-US" sz="1600" b="1" dirty="0">
-                <a:solidFill>
-                  <a:srgbClr val="0000FF"/>
-                </a:solidFill>
-                <a:latin typeface="Arial" pitchFamily="34" charset="0"/>
-                <a:ea typeface="Arial" pitchFamily="34" charset="-122"/>
-                <a:cs typeface="Arial" pitchFamily="34" charset="-120"/>
-              </a:rPr>
-              <a:t>R(W)</a:t>
-            </a:r>
-            <a:pPr algn="l" indent="0" marL="0">
-              <a:lnSpc>
-                <a:spcPts val="1920"/>
-              </a:lnSpc>
-              <a:buNone/>
-            </a:pPr>
-            <a:r>
-              <a:rPr lang="en-US" sz="1600" dirty="0">
-                <a:solidFill>
-                  <a:srgbClr val="000000"/>
-                </a:solidFill>
-                <a:latin typeface="Arial" pitchFamily="34" charset="0"/>
-                <a:ea typeface="Arial" pitchFamily="34" charset="-122"/>
-                <a:cs typeface="Arial" pitchFamily="34" charset="-120"/>
-              </a:rPr>
-              <a:t>   (</a:t>
-            </a:r>
-            <a:pPr algn="l" indent="0" marL="0">
-              <a:lnSpc>
-                <a:spcPts val="1920"/>
-              </a:lnSpc>
-              <a:buNone/>
-            </a:pPr>
-            <a:r>
-              <a:rPr lang="en-US" sz="1600" dirty="0">
-                <a:solidFill>
-                  <a:srgbClr val="0000FF"/>
-                </a:solidFill>
-                <a:latin typeface="Arial" pitchFamily="34" charset="0"/>
-                <a:ea typeface="Arial" pitchFamily="34" charset="-122"/>
-                <a:cs typeface="Arial" pitchFamily="34" charset="-120"/>
-              </a:rPr>
-              <a:t>λ</a:t>
-            </a:r>
-            <a:pPr algn="l" indent="0" marL="0">
-              <a:lnSpc>
-                <a:spcPts val="1920"/>
-              </a:lnSpc>
-              <a:buNone/>
-            </a:pPr>
-            <a:r>
-              <a:rPr lang="en-US" sz="1600" dirty="0">
-                <a:solidFill>
-                  <a:srgbClr val="000000"/>
-                </a:solidFill>
-                <a:latin typeface="Arial" pitchFamily="34" charset="0"/>
-                <a:ea typeface="Arial" pitchFamily="34" charset="-122"/>
-                <a:cs typeface="Arial" pitchFamily="34" charset="-120"/>
-              </a:rPr>
-              <a:t> is a weighting factor)</a:t>
-            </a:r>
-            <a:endParaRPr lang="en-US" sz="1600" dirty="0"/>
-          </a:p>
-        </p:txBody>
-      </p:sp>
-      <p:sp>
-        <p:nvSpPr>
-          <p:cNvPr id="18" name="Shape 16"/>
-          <p:cNvSpPr/>
-          <p:nvPr/>
-        </p:nvSpPr>
-        <p:spPr>
-          <a:xfrm>
-            <a:off x="685800" y="5054600"/>
-            <a:ext cx="10795000" cy="304800"/>
-          </a:xfrm>
-          <a:prstGeom prst="rect">
-            <a:avLst/>
-          </a:prstGeom>
-          <a:solidFill>
-            <a:srgbClr val="FFEBEE"/>
-          </a:solidFill>
-          <a:ln/>
-        </p:spPr>
-      </p:sp>
-      <p:sp>
-        <p:nvSpPr>
-          <p:cNvPr id="19" name="Text 17"/>
-          <p:cNvSpPr/>
-          <p:nvPr/>
-        </p:nvSpPr>
-        <p:spPr>
-          <a:xfrm>
-            <a:off x="868680" y="5072888"/>
-            <a:ext cx="10429240" cy="268224"/>
-          </a:xfrm>
-          <a:prstGeom prst="rect">
-            <a:avLst/>
-          </a:prstGeom>
-          <a:noFill/>
-          <a:ln/>
-        </p:spPr>
-        <p:txBody>
-          <a:bodyPr wrap="square" lIns="0" tIns="0" rIns="0" bIns="0" rtlCol="0" anchor="t"/>
-          <a:lstStyle/>
-          <a:p>
-            <a:pPr algn="l" indent="0" marL="0">
-              <a:lnSpc>
-                <a:spcPts val="1920"/>
-              </a:lnSpc>
-              <a:buNone/>
-            </a:pPr>
-            <a:r>
-              <a:rPr lang="en-US" sz="1600" dirty="0">
-                <a:solidFill>
-                  <a:srgbClr val="000000"/>
-                </a:solidFill>
-                <a:latin typeface="Arial" pitchFamily="34" charset="0"/>
-                <a:ea typeface="Arial" pitchFamily="34" charset="-122"/>
-                <a:cs typeface="Arial" pitchFamily="34" charset="-120"/>
-              </a:rPr>
-              <a:t>Define </a:t>
-            </a:r>
-            <a:pPr algn="l" indent="0" marL="0">
-              <a:lnSpc>
-                <a:spcPts val="1920"/>
-              </a:lnSpc>
-              <a:buNone/>
-            </a:pPr>
-            <a:r>
-              <a:rPr lang="en-US" sz="1600" b="1" dirty="0">
-                <a:solidFill>
-                  <a:srgbClr val="FF0000"/>
-                </a:solidFill>
-                <a:latin typeface="Arial" pitchFamily="34" charset="0"/>
-                <a:ea typeface="Arial" pitchFamily="34" charset="-122"/>
-                <a:cs typeface="Arial" pitchFamily="34" charset="-120"/>
-              </a:rPr>
-              <a:t>Loss</a:t>
-            </a:r>
-            <a:pPr algn="l" indent="0" marL="0">
-              <a:lnSpc>
-                <a:spcPts val="1920"/>
-              </a:lnSpc>
-              <a:buNone/>
-            </a:pPr>
-            <a:r>
-              <a:rPr lang="en-US" sz="1600" dirty="0">
-                <a:solidFill>
-                  <a:srgbClr val="000000"/>
-                </a:solidFill>
-                <a:latin typeface="Arial" pitchFamily="34" charset="0"/>
-                <a:ea typeface="Arial" pitchFamily="34" charset="-122"/>
-                <a:cs typeface="Arial" pitchFamily="34" charset="-120"/>
-              </a:rPr>
-              <a:t> function as </a:t>
-            </a:r>
-            <a:pPr algn="l" indent="0" marL="0">
-              <a:lnSpc>
-                <a:spcPts val="1920"/>
-              </a:lnSpc>
-              <a:buNone/>
-            </a:pPr>
-            <a:r>
-              <a:rPr lang="en-US" sz="1600" b="1" dirty="0">
-                <a:solidFill>
-                  <a:srgbClr val="008000"/>
-                </a:solidFill>
-                <a:latin typeface="Arial" pitchFamily="34" charset="0"/>
-                <a:ea typeface="Arial" pitchFamily="34" charset="-122"/>
-                <a:cs typeface="Arial" pitchFamily="34" charset="-120"/>
-              </a:rPr>
-              <a:t>squared distance</a:t>
-            </a:r>
-            <a:pPr algn="l" indent="0" marL="0">
-              <a:lnSpc>
-                <a:spcPts val="1920"/>
-              </a:lnSpc>
-              <a:buNone/>
-            </a:pPr>
-            <a:r>
-              <a:rPr lang="en-US" sz="1600" dirty="0">
-                <a:solidFill>
-                  <a:srgbClr val="000000"/>
-                </a:solidFill>
-                <a:latin typeface="Arial" pitchFamily="34" charset="0"/>
-                <a:ea typeface="Arial" pitchFamily="34" charset="-122"/>
-                <a:cs typeface="Arial" pitchFamily="34" charset="-120"/>
-              </a:rPr>
-              <a:t> between </a:t>
-            </a:r>
-            <a:pPr algn="l" indent="0" marL="0">
-              <a:lnSpc>
-                <a:spcPts val="1920"/>
-              </a:lnSpc>
-              <a:buNone/>
-            </a:pPr>
-            <a:r>
-              <a:rPr lang="en-US" sz="1600" b="1" i="1" dirty="0">
-                <a:solidFill>
-                  <a:srgbClr val="000000"/>
-                </a:solidFill>
-                <a:latin typeface="Arial" pitchFamily="34" charset="0"/>
-                <a:ea typeface="Arial" pitchFamily="34" charset="-122"/>
-                <a:cs typeface="Arial" pitchFamily="34" charset="-120"/>
-              </a:rPr>
-              <a:t>Ŷ</a:t>
-            </a:r>
-            <a:pPr algn="l" indent="0" marL="0">
-              <a:lnSpc>
-                <a:spcPts val="1920"/>
-              </a:lnSpc>
-              <a:buNone/>
-            </a:pPr>
-            <a:r>
-              <a:rPr lang="en-US" sz="1600" dirty="0">
-                <a:solidFill>
-                  <a:srgbClr val="000000"/>
-                </a:solidFill>
-                <a:latin typeface="Arial" pitchFamily="34" charset="0"/>
-                <a:ea typeface="Arial" pitchFamily="34" charset="-122"/>
-                <a:cs typeface="Arial" pitchFamily="34" charset="-120"/>
-              </a:rPr>
-              <a:t> and </a:t>
-            </a:r>
-            <a:pPr algn="l" indent="0" marL="0">
-              <a:lnSpc>
-                <a:spcPts val="1920"/>
-              </a:lnSpc>
-              <a:buNone/>
-            </a:pPr>
-            <a:r>
-              <a:rPr lang="en-US" sz="1600" b="1" i="1" dirty="0">
-                <a:solidFill>
-                  <a:srgbClr val="000000"/>
-                </a:solidFill>
-                <a:latin typeface="Arial" pitchFamily="34" charset="0"/>
-                <a:ea typeface="Arial" pitchFamily="34" charset="-122"/>
-                <a:cs typeface="Arial" pitchFamily="34" charset="-120"/>
-              </a:rPr>
-              <a:t>Y</a:t>
-            </a:r>
-            <a:endParaRPr lang="en-US" sz="1600" dirty="0"/>
-          </a:p>
-        </p:txBody>
-      </p:sp>
-      <p:sp>
-        <p:nvSpPr>
-          <p:cNvPr id="20" name="Shape 18"/>
-          <p:cNvSpPr/>
-          <p:nvPr/>
-        </p:nvSpPr>
-        <p:spPr>
-          <a:xfrm>
-            <a:off x="685800" y="5943600"/>
-            <a:ext cx="5029200" cy="660400"/>
-          </a:xfrm>
-          <a:prstGeom prst="rect">
-            <a:avLst/>
-          </a:prstGeom>
-          <a:solidFill>
-            <a:srgbClr val="E1F5FE"/>
-          </a:solidFill>
-          <a:ln/>
-        </p:spPr>
-      </p:sp>
-      <p:sp>
-        <p:nvSpPr>
-          <p:cNvPr id="21" name="Text 19"/>
-          <p:cNvSpPr/>
-          <p:nvPr/>
-        </p:nvSpPr>
-        <p:spPr>
-          <a:xfrm>
-            <a:off x="822960" y="6035040"/>
-            <a:ext cx="4754880" cy="477520"/>
-          </a:xfrm>
-          <a:prstGeom prst="rect">
-            <a:avLst/>
-          </a:prstGeom>
-          <a:noFill/>
-          <a:ln/>
-        </p:spPr>
-        <p:txBody>
-          <a:bodyPr wrap="square" lIns="0" tIns="0" rIns="0" bIns="0" rtlCol="0" anchor="t"/>
-          <a:lstStyle/>
-          <a:p>
-            <a:pPr algn="l" indent="0" marL="0">
-              <a:lnSpc>
-                <a:spcPts val="1920"/>
-              </a:lnSpc>
-              <a:buNone/>
-            </a:pPr>
-            <a:r>
-              <a:rPr lang="en-US" sz="1600" b="1" dirty="0">
-                <a:solidFill>
-                  <a:srgbClr val="FF0000"/>
-                </a:solidFill>
-                <a:latin typeface="Arial" pitchFamily="34" charset="0"/>
-                <a:ea typeface="Arial" pitchFamily="34" charset="-122"/>
-                <a:cs typeface="Arial" pitchFamily="34" charset="-120"/>
-              </a:rPr>
-              <a:t>Loss Term</a:t>
-            </a:r>
-            <a:pPr algn="l" indent="0" marL="0">
-              <a:lnSpc>
-                <a:spcPts val="1920"/>
-              </a:lnSpc>
-              <a:buNone/>
-            </a:pPr>
-            <a:r>
-              <a:rPr lang="en-US" sz="1600" dirty="0">
-                <a:solidFill>
-                  <a:srgbClr val="000000"/>
-                </a:solidFill>
-                <a:latin typeface="Arial" pitchFamily="34" charset="0"/>
-                <a:ea typeface="Arial" pitchFamily="34" charset="-122"/>
-                <a:cs typeface="Arial" pitchFamily="34" charset="-120"/>
-              </a:rPr>
-              <a:t> = ||Y-Ŷ||² = (Y-Ŷ)ᵀ(Y-Ŷ)</a:t>
-            </a:r>
-            <a:endParaRPr lang="en-US" sz="1600" dirty="0"/>
-          </a:p>
-        </p:txBody>
-      </p:sp>
-      <p:sp>
-        <p:nvSpPr>
-          <p:cNvPr id="22" name="Shape 20"/>
-          <p:cNvSpPr/>
-          <p:nvPr/>
-        </p:nvSpPr>
-        <p:spPr>
-          <a:xfrm>
-            <a:off x="6350000" y="5943600"/>
-            <a:ext cx="5029200" cy="660400"/>
-          </a:xfrm>
-          <a:prstGeom prst="rect">
-            <a:avLst/>
-          </a:prstGeom>
-          <a:solidFill>
-            <a:srgbClr val="E1F5FE"/>
-          </a:solidFill>
-          <a:ln/>
-        </p:spPr>
-      </p:sp>
-      <p:sp>
-        <p:nvSpPr>
-          <p:cNvPr id="23" name="Text 21"/>
-          <p:cNvSpPr/>
-          <p:nvPr/>
-        </p:nvSpPr>
-        <p:spPr>
-          <a:xfrm>
-            <a:off x="6487160" y="6035040"/>
-            <a:ext cx="4754880" cy="477520"/>
-          </a:xfrm>
-          <a:prstGeom prst="rect">
-            <a:avLst/>
-          </a:prstGeom>
-          <a:noFill/>
-          <a:ln/>
-        </p:spPr>
-        <p:txBody>
-          <a:bodyPr wrap="square" lIns="0" tIns="0" rIns="0" bIns="0" rtlCol="0" anchor="t"/>
-          <a:lstStyle/>
-          <a:p>
-            <a:pPr algn="l" indent="0" marL="0">
-              <a:lnSpc>
-                <a:spcPts val="1920"/>
-              </a:lnSpc>
-              <a:buNone/>
-            </a:pPr>
-            <a:r>
-              <a:rPr lang="en-US" sz="1600" b="1" dirty="0">
-                <a:solidFill>
-                  <a:srgbClr val="0000FF"/>
-                </a:solidFill>
-                <a:latin typeface="Arial" pitchFamily="34" charset="0"/>
-                <a:ea typeface="Arial" pitchFamily="34" charset="-122"/>
-                <a:cs typeface="Arial" pitchFamily="34" charset="-120"/>
-              </a:rPr>
-              <a:t>Regularization Term</a:t>
-            </a:r>
-            <a:pPr algn="l" indent="0" marL="0">
-              <a:lnSpc>
-                <a:spcPts val="1920"/>
-              </a:lnSpc>
-              <a:buNone/>
-            </a:pPr>
-            <a:r>
-              <a:rPr lang="en-US" sz="1600" dirty="0">
-                <a:solidFill>
-                  <a:srgbClr val="000000"/>
-                </a:solidFill>
-                <a:latin typeface="Arial" pitchFamily="34" charset="0"/>
-                <a:ea typeface="Arial" pitchFamily="34" charset="-122"/>
-                <a:cs typeface="Arial" pitchFamily="34" charset="-120"/>
-              </a:rPr>
-              <a:t> R = ||W||² = WᵀW</a:t>
-            </a:r>
-            <a:endParaRPr lang="en-US" sz="1600" dirty="0"/>
-          </a:p>
-        </p:txBody>
-      </p:sp>
-      <p:sp>
-        <p:nvSpPr>
-          <p:cNvPr id="24" name="Shape 22"/>
-          <p:cNvSpPr/>
-          <p:nvPr/>
-        </p:nvSpPr>
-        <p:spPr>
-          <a:xfrm>
-            <a:off x="685800" y="6477000"/>
-            <a:ext cx="10795000" cy="127000"/>
-          </a:xfrm>
-          <a:prstGeom prst="rect">
-            <a:avLst/>
-          </a:prstGeom>
-          <a:solidFill>
-            <a:srgbClr val="E1F5FE"/>
-          </a:solidFill>
-          <a:ln/>
-        </p:spPr>
-      </p:sp>
-      <p:sp>
-        <p:nvSpPr>
-          <p:cNvPr id="25" name="Text 23"/>
-          <p:cNvSpPr/>
-          <p:nvPr/>
-        </p:nvSpPr>
-        <p:spPr>
-          <a:xfrm>
-            <a:off x="868680" y="6486144"/>
-            <a:ext cx="10429240" cy="108712"/>
-          </a:xfrm>
-          <a:prstGeom prst="rect">
-            <a:avLst/>
-          </a:prstGeom>
-          <a:noFill/>
-          <a:ln/>
-        </p:spPr>
-        <p:txBody>
-          <a:bodyPr wrap="square" lIns="0" tIns="0" rIns="0" bIns="0" rtlCol="0" anchor="t"/>
-          <a:lstStyle/>
-          <a:p>
-            <a:pPr algn="l" indent="0" marL="0">
-              <a:lnSpc>
-                <a:spcPts val="1680"/>
-              </a:lnSpc>
-              <a:buNone/>
-            </a:pPr>
-            <a:r>
-              <a:rPr lang="en-US" sz="1400" dirty="0">
-                <a:solidFill>
-                  <a:srgbClr val="000000"/>
-                </a:solidFill>
-                <a:latin typeface="Arial" pitchFamily="34" charset="0"/>
-                <a:ea typeface="Arial" pitchFamily="34" charset="-122"/>
-                <a:cs typeface="Arial" pitchFamily="34" charset="-120"/>
-              </a:rPr>
-              <a:t>Objective function </a:t>
-            </a:r>
-            <a:pPr algn="l" indent="0" marL="0">
-              <a:lnSpc>
-                <a:spcPts val="1680"/>
-              </a:lnSpc>
-              <a:buNone/>
-            </a:pPr>
-            <a:r>
-              <a:rPr lang="en-US" sz="1400" b="1" dirty="0">
-                <a:solidFill>
-                  <a:srgbClr val="0000FF"/>
-                </a:solidFill>
-                <a:latin typeface="Arial" pitchFamily="34" charset="0"/>
-                <a:ea typeface="Arial" pitchFamily="34" charset="-122"/>
-                <a:cs typeface="Arial" pitchFamily="34" charset="-120"/>
-              </a:rPr>
-              <a:t>J(W)</a:t>
-            </a:r>
-            <a:pPr algn="l" indent="0" marL="0">
-              <a:lnSpc>
-                <a:spcPts val="1680"/>
-              </a:lnSpc>
-              <a:buNone/>
-            </a:pPr>
-            <a:r>
-              <a:rPr lang="en-US" sz="1400" dirty="0">
-                <a:solidFill>
-                  <a:srgbClr val="000000"/>
-                </a:solidFill>
-                <a:latin typeface="Arial" pitchFamily="34" charset="0"/>
-                <a:ea typeface="Arial" pitchFamily="34" charset="-122"/>
-                <a:cs typeface="Arial" pitchFamily="34" charset="-120"/>
-              </a:rPr>
-              <a:t> = 1/2 [ (Y-Ŷ)ᵀ(Y-Ŷ) + </a:t>
-            </a:r>
-            <a:pPr algn="l" indent="0" marL="0">
-              <a:lnSpc>
-                <a:spcPts val="1680"/>
-              </a:lnSpc>
-              <a:buNone/>
-            </a:pPr>
-            <a:r>
-              <a:rPr lang="en-US" sz="1400" dirty="0">
-                <a:solidFill>
-                  <a:srgbClr val="0000FF"/>
-                </a:solidFill>
-                <a:latin typeface="Arial" pitchFamily="34" charset="0"/>
-                <a:ea typeface="Arial" pitchFamily="34" charset="-122"/>
-                <a:cs typeface="Arial" pitchFamily="34" charset="-120"/>
-              </a:rPr>
-              <a:t>λ</a:t>
-            </a:r>
-            <a:pPr algn="l" indent="0" marL="0">
-              <a:lnSpc>
-                <a:spcPts val="1680"/>
-              </a:lnSpc>
-              <a:buNone/>
-            </a:pPr>
-            <a:r>
-              <a:rPr lang="en-US" sz="1400" dirty="0">
-                <a:solidFill>
-                  <a:srgbClr val="000000"/>
-                </a:solidFill>
-                <a:latin typeface="Arial" pitchFamily="34" charset="0"/>
-                <a:ea typeface="Arial" pitchFamily="34" charset="-122"/>
-                <a:cs typeface="Arial" pitchFamily="34" charset="-120"/>
-              </a:rPr>
-              <a:t> WᵀW ]</a:t>
+                <a:spcPts val="1700"/>
+              </a:lnSpc>
+              <a:buNone/>
+            </a:pPr>
+            <a:r>
+              <a:rPr lang="en-US" sz="1400" b="1" u="sng" dirty="0">
+                <a:solidFill>
+                  <a:srgbClr val="000000"/>
+                </a:solidFill>
+                <a:latin typeface="Arial" pitchFamily="34" charset="0"/>
+                <a:ea typeface="Arial" pitchFamily="34" charset="-122"/>
+                <a:cs typeface="Arial" pitchFamily="34" charset="-120"/>
+              </a:rPr>
+              <a:t>W</a:t>
             </a:r>
             <a:endParaRPr lang="en-US" sz="1400" dirty="0"/>
           </a:p>
         </p:txBody>
       </p:sp>
+      <p:sp>
+        <p:nvSpPr>
+          <p:cNvPr id="21" name="Shape 17"/>
+          <p:cNvSpPr/>
+          <p:nvPr/>
+        </p:nvSpPr>
+        <p:spPr>
+          <a:xfrm>
+            <a:off x="768350" y="3086100"/>
+            <a:ext cx="10642600" cy="546100"/>
+          </a:xfrm>
+          <a:prstGeom prst="rect">
+            <a:avLst/>
+          </a:prstGeom>
+          <a:solidFill>
+            <a:srgbClr val="F9FBDC"/>
+          </a:solidFill>
+          <a:ln/>
+        </p:spPr>
+      </p:sp>
+      <p:sp>
+        <p:nvSpPr>
+          <p:cNvPr id="22" name="Shape 18"/>
+          <p:cNvSpPr/>
+          <p:nvPr/>
+        </p:nvSpPr>
+        <p:spPr>
+          <a:xfrm>
+            <a:off x="768350" y="3086100"/>
+            <a:ext cx="10642600" cy="38100"/>
+          </a:xfrm>
+          <a:prstGeom prst="rect">
+            <a:avLst/>
+          </a:prstGeom>
+          <a:solidFill>
+            <a:srgbClr val="1E0060"/>
+          </a:solidFill>
+          <a:ln/>
+        </p:spPr>
+      </p:sp>
+      <p:sp>
+        <p:nvSpPr>
+          <p:cNvPr id="23" name="Shape 19"/>
+          <p:cNvSpPr/>
+          <p:nvPr/>
+        </p:nvSpPr>
+        <p:spPr>
+          <a:xfrm>
+            <a:off x="768350" y="3594100"/>
+            <a:ext cx="10642600" cy="38100"/>
+          </a:xfrm>
+          <a:prstGeom prst="rect">
+            <a:avLst/>
+          </a:prstGeom>
+          <a:solidFill>
+            <a:srgbClr val="1E0060"/>
+          </a:solidFill>
+          <a:ln/>
+        </p:spPr>
+      </p:sp>
+      <p:sp>
+        <p:nvSpPr>
+          <p:cNvPr id="24" name="Text 20"/>
+          <p:cNvSpPr/>
+          <p:nvPr/>
+        </p:nvSpPr>
+        <p:spPr>
+          <a:xfrm>
+            <a:off x="996950" y="3124200"/>
+            <a:ext cx="10185400" cy="469900"/>
+          </a:xfrm>
+          <a:prstGeom prst="rect">
+            <a:avLst/>
+          </a:prstGeom>
+          <a:noFill/>
+          <a:ln/>
+        </p:spPr>
+        <p:txBody>
+          <a:bodyPr wrap="square" lIns="0" tIns="0" rIns="0" bIns="0" rtlCol="0" anchor="ctr"/>
+          <a:lstStyle/>
+          <a:p>
+            <a:pPr algn="l" indent="0" marL="0">
+              <a:lnSpc>
+                <a:spcPts val="2000"/>
+              </a:lnSpc>
+              <a:buNone/>
+            </a:pPr>
+            <a:r>
+              <a:rPr lang="en-US" sz="1700" dirty="0">
+                <a:solidFill>
+                  <a:srgbClr val="000000"/>
+                </a:solidFill>
+                <a:latin typeface="Arial" pitchFamily="34" charset="0"/>
+                <a:ea typeface="Arial" pitchFamily="34" charset="-122"/>
+                <a:cs typeface="Arial" pitchFamily="34" charset="-120"/>
+              </a:rPr>
+              <a:t>Objective is </a:t>
+            </a:r>
+            <a:pPr algn="l" indent="0" marL="0">
+              <a:lnSpc>
+                <a:spcPts val="2000"/>
+              </a:lnSpc>
+              <a:buNone/>
+            </a:pPr>
+            <a:r>
+              <a:rPr lang="en-US" sz="1700" b="1" dirty="0">
+                <a:solidFill>
+                  <a:srgbClr val="C00000"/>
+                </a:solidFill>
+                <a:latin typeface="Arial" pitchFamily="34" charset="0"/>
+                <a:ea typeface="Arial" pitchFamily="34" charset="-122"/>
+                <a:cs typeface="Arial" pitchFamily="34" charset="-120"/>
+              </a:rPr>
+              <a:t>Ŷ=Y</a:t>
+            </a:r>
+            <a:pPr algn="l" indent="0" marL="0">
+              <a:lnSpc>
+                <a:spcPts val="2000"/>
+              </a:lnSpc>
+              <a:buNone/>
+            </a:pPr>
+            <a:r>
+              <a:rPr lang="en-US" sz="1700" dirty="0">
+                <a:solidFill>
+                  <a:srgbClr val="000000"/>
+                </a:solidFill>
+                <a:latin typeface="Arial" pitchFamily="34" charset="0"/>
+                <a:ea typeface="Arial" pitchFamily="34" charset="-122"/>
+                <a:cs typeface="Arial" pitchFamily="34" charset="-120"/>
+              </a:rPr>
+              <a:t> and </a:t>
+            </a:r>
+            <a:pPr algn="l" indent="0" marL="0">
+              <a:lnSpc>
+                <a:spcPts val="2000"/>
+              </a:lnSpc>
+              <a:buNone/>
+            </a:pPr>
+            <a:r>
+              <a:rPr lang="en-US" sz="1700" b="1" dirty="0">
+                <a:solidFill>
+                  <a:srgbClr val="0000FF"/>
+                </a:solidFill>
+                <a:latin typeface="Arial" pitchFamily="34" charset="0"/>
+                <a:ea typeface="Arial" pitchFamily="34" charset="-122"/>
+                <a:cs typeface="Arial" pitchFamily="34" charset="-120"/>
+              </a:rPr>
+              <a:t>||W||</a:t>
+            </a:r>
+            <a:pPr algn="l" indent="0" marL="0">
+              <a:lnSpc>
+                <a:spcPts val="2000"/>
+              </a:lnSpc>
+              <a:buNone/>
+            </a:pPr>
+            <a:r>
+              <a:rPr lang="en-US" sz="1700" dirty="0">
+                <a:solidFill>
+                  <a:srgbClr val="000000"/>
+                </a:solidFill>
+                <a:latin typeface="Arial" pitchFamily="34" charset="0"/>
+                <a:ea typeface="Arial" pitchFamily="34" charset="-122"/>
+                <a:cs typeface="Arial" pitchFamily="34" charset="-120"/>
+              </a:rPr>
+              <a:t> is minimum This is called </a:t>
+            </a:r>
+            <a:pPr algn="l" indent="0" marL="0">
+              <a:lnSpc>
+                <a:spcPts val="2000"/>
+              </a:lnSpc>
+              <a:buNone/>
+            </a:pPr>
+            <a:r>
+              <a:rPr lang="en-US" sz="1700" b="1" dirty="0">
+                <a:solidFill>
+                  <a:srgbClr val="008000"/>
+                </a:solidFill>
+                <a:latin typeface="Arial" pitchFamily="34" charset="0"/>
+                <a:ea typeface="Arial" pitchFamily="34" charset="-122"/>
+                <a:cs typeface="Arial" pitchFamily="34" charset="-120"/>
+              </a:rPr>
+              <a:t>Ridge Regularization</a:t>
+            </a:r>
+            <a:endParaRPr lang="en-US" sz="1700" dirty="0"/>
+          </a:p>
+        </p:txBody>
+      </p:sp>
+      <p:sp>
+        <p:nvSpPr>
+          <p:cNvPr id="25" name="Shape 21"/>
+          <p:cNvSpPr/>
+          <p:nvPr/>
+        </p:nvSpPr>
+        <p:spPr>
+          <a:xfrm>
+            <a:off x="768350" y="3848100"/>
+            <a:ext cx="10642600" cy="495300"/>
+          </a:xfrm>
+          <a:prstGeom prst="rect">
+            <a:avLst/>
+          </a:prstGeom>
+          <a:solidFill>
+            <a:srgbClr val="F9FBDC"/>
+          </a:solidFill>
+          <a:ln/>
+        </p:spPr>
+      </p:sp>
+      <p:sp>
+        <p:nvSpPr>
+          <p:cNvPr id="26" name="Shape 22"/>
+          <p:cNvSpPr/>
+          <p:nvPr/>
+        </p:nvSpPr>
+        <p:spPr>
+          <a:xfrm>
+            <a:off x="768350" y="3848100"/>
+            <a:ext cx="10642600" cy="38100"/>
+          </a:xfrm>
+          <a:prstGeom prst="rect">
+            <a:avLst/>
+          </a:prstGeom>
+          <a:solidFill>
+            <a:srgbClr val="1E0060"/>
+          </a:solidFill>
+          <a:ln/>
+        </p:spPr>
+      </p:sp>
+      <p:sp>
+        <p:nvSpPr>
+          <p:cNvPr id="27" name="Shape 23"/>
+          <p:cNvSpPr/>
+          <p:nvPr/>
+        </p:nvSpPr>
+        <p:spPr>
+          <a:xfrm>
+            <a:off x="768350" y="4305300"/>
+            <a:ext cx="10642600" cy="38100"/>
+          </a:xfrm>
+          <a:prstGeom prst="rect">
+            <a:avLst/>
+          </a:prstGeom>
+          <a:solidFill>
+            <a:srgbClr val="1E0060"/>
+          </a:solidFill>
+          <a:ln/>
+        </p:spPr>
+      </p:sp>
+      <p:sp>
+        <p:nvSpPr>
+          <p:cNvPr id="28" name="Text 24"/>
+          <p:cNvSpPr/>
+          <p:nvPr/>
+        </p:nvSpPr>
+        <p:spPr>
+          <a:xfrm>
+            <a:off x="996950" y="3886200"/>
+            <a:ext cx="10185400" cy="419100"/>
+          </a:xfrm>
+          <a:prstGeom prst="rect">
+            <a:avLst/>
+          </a:prstGeom>
+          <a:noFill/>
+          <a:ln/>
+        </p:spPr>
+        <p:txBody>
+          <a:bodyPr wrap="square" lIns="0" tIns="0" rIns="0" bIns="0" rtlCol="0" anchor="ctr"/>
+          <a:lstStyle/>
+          <a:p>
+            <a:pPr algn="l" indent="0" marL="0">
+              <a:lnSpc>
+                <a:spcPts val="2000"/>
+              </a:lnSpc>
+              <a:buNone/>
+            </a:pPr>
+            <a:r>
+              <a:rPr lang="en-US" sz="1700" dirty="0">
+                <a:solidFill>
+                  <a:srgbClr val="000000"/>
+                </a:solidFill>
+                <a:latin typeface="Arial" pitchFamily="34" charset="0"/>
+                <a:ea typeface="Arial" pitchFamily="34" charset="-122"/>
+                <a:cs typeface="Arial" pitchFamily="34" charset="-120"/>
+              </a:rPr>
+              <a:t>Objective function </a:t>
+            </a:r>
+            <a:pPr algn="l" indent="0" marL="0">
+              <a:lnSpc>
+                <a:spcPts val="2000"/>
+              </a:lnSpc>
+              <a:buNone/>
+            </a:pPr>
+            <a:r>
+              <a:rPr lang="en-US" sz="1700" b="1" dirty="0">
+                <a:solidFill>
+                  <a:srgbClr val="0000FF"/>
+                </a:solidFill>
+                <a:latin typeface="Arial" pitchFamily="34" charset="0"/>
+                <a:ea typeface="Arial" pitchFamily="34" charset="-122"/>
+                <a:cs typeface="Arial" pitchFamily="34" charset="-120"/>
+              </a:rPr>
+              <a:t>J(W)</a:t>
+            </a:r>
+            <a:pPr algn="l" indent="0" marL="0">
+              <a:lnSpc>
+                <a:spcPts val="2000"/>
+              </a:lnSpc>
+              <a:buNone/>
+            </a:pPr>
+            <a:r>
+              <a:rPr lang="en-US" sz="1700" dirty="0">
+                <a:solidFill>
+                  <a:srgbClr val="000000"/>
+                </a:solidFill>
+                <a:latin typeface="Arial" pitchFamily="34" charset="0"/>
+                <a:ea typeface="Arial" pitchFamily="34" charset="-122"/>
+                <a:cs typeface="Arial" pitchFamily="34" charset="-120"/>
+              </a:rPr>
+              <a:t> = </a:t>
+            </a:r>
+            <a:pPr algn="l" indent="0" marL="0">
+              <a:lnSpc>
+                <a:spcPts val="2000"/>
+              </a:lnSpc>
+              <a:buNone/>
+            </a:pPr>
+            <a:r>
+              <a:rPr lang="en-US" sz="1700" b="1" dirty="0">
+                <a:solidFill>
+                  <a:srgbClr val="C00000"/>
+                </a:solidFill>
+                <a:latin typeface="Arial" pitchFamily="34" charset="0"/>
+                <a:ea typeface="Arial" pitchFamily="34" charset="-122"/>
+                <a:cs typeface="Arial" pitchFamily="34" charset="-120"/>
+              </a:rPr>
+              <a:t>Loss</a:t>
+            </a:r>
+            <a:pPr algn="l" indent="0" marL="0">
+              <a:lnSpc>
+                <a:spcPts val="2000"/>
+              </a:lnSpc>
+              <a:buNone/>
+            </a:pPr>
+            <a:r>
+              <a:rPr lang="en-US" sz="1700" dirty="0">
+                <a:solidFill>
+                  <a:srgbClr val="000000"/>
+                </a:solidFill>
+                <a:latin typeface="Arial" pitchFamily="34" charset="0"/>
+                <a:ea typeface="Arial" pitchFamily="34" charset="-122"/>
+                <a:cs typeface="Arial" pitchFamily="34" charset="-120"/>
+              </a:rPr>
+              <a:t>(X,Y,W) + </a:t>
+            </a:r>
+            <a:pPr algn="l" indent="0" marL="0">
+              <a:lnSpc>
+                <a:spcPts val="2000"/>
+              </a:lnSpc>
+              <a:buNone/>
+            </a:pPr>
+            <a:r>
+              <a:rPr lang="en-US" sz="1700" dirty="0">
+                <a:solidFill>
+                  <a:srgbClr val="0000FF"/>
+                </a:solidFill>
+                <a:latin typeface="Arial" pitchFamily="34" charset="0"/>
+                <a:ea typeface="Arial" pitchFamily="34" charset="-122"/>
+                <a:cs typeface="Arial" pitchFamily="34" charset="-120"/>
+              </a:rPr>
+              <a:t>λ</a:t>
+            </a:r>
+            <a:pPr algn="l" indent="0" marL="0">
+              <a:lnSpc>
+                <a:spcPts val="2000"/>
+              </a:lnSpc>
+              <a:buNone/>
+            </a:pPr>
+            <a:r>
+              <a:rPr lang="en-US" sz="1700" dirty="0">
+                <a:solidFill>
+                  <a:srgbClr val="000000"/>
+                </a:solidFill>
+                <a:latin typeface="Arial" pitchFamily="34" charset="0"/>
+                <a:ea typeface="Arial" pitchFamily="34" charset="-122"/>
+                <a:cs typeface="Arial" pitchFamily="34" charset="-120"/>
+              </a:rPr>
+              <a:t> </a:t>
+            </a:r>
+            <a:pPr algn="l" indent="0" marL="0">
+              <a:lnSpc>
+                <a:spcPts val="2000"/>
+              </a:lnSpc>
+              <a:buNone/>
+            </a:pPr>
+            <a:r>
+              <a:rPr lang="en-US" sz="1700" b="1" dirty="0">
+                <a:solidFill>
+                  <a:srgbClr val="0000FF"/>
+                </a:solidFill>
+                <a:latin typeface="Arial" pitchFamily="34" charset="0"/>
+                <a:ea typeface="Arial" pitchFamily="34" charset="-122"/>
+                <a:cs typeface="Arial" pitchFamily="34" charset="-120"/>
+              </a:rPr>
+              <a:t>R(W)</a:t>
+            </a:r>
+            <a:pPr algn="l" indent="0" marL="0">
+              <a:lnSpc>
+                <a:spcPts val="2000"/>
+              </a:lnSpc>
+              <a:buNone/>
+            </a:pPr>
+            <a:r>
+              <a:rPr lang="en-US" sz="1700" dirty="0">
+                <a:solidFill>
+                  <a:srgbClr val="000000"/>
+                </a:solidFill>
+                <a:latin typeface="Arial" pitchFamily="34" charset="0"/>
+                <a:ea typeface="Arial" pitchFamily="34" charset="-122"/>
+                <a:cs typeface="Arial" pitchFamily="34" charset="-120"/>
+              </a:rPr>
+              <a:t> (</a:t>
+            </a:r>
+            <a:pPr algn="l" indent="0" marL="0">
+              <a:lnSpc>
+                <a:spcPts val="2000"/>
+              </a:lnSpc>
+              <a:buNone/>
+            </a:pPr>
+            <a:r>
+              <a:rPr lang="en-US" sz="1700" dirty="0">
+                <a:solidFill>
+                  <a:srgbClr val="0000FF"/>
+                </a:solidFill>
+                <a:latin typeface="Arial" pitchFamily="34" charset="0"/>
+                <a:ea typeface="Arial" pitchFamily="34" charset="-122"/>
+                <a:cs typeface="Arial" pitchFamily="34" charset="-120"/>
+              </a:rPr>
+              <a:t>λ</a:t>
+            </a:r>
+            <a:pPr algn="l" indent="0" marL="0">
+              <a:lnSpc>
+                <a:spcPts val="2000"/>
+              </a:lnSpc>
+              <a:buNone/>
+            </a:pPr>
+            <a:r>
+              <a:rPr lang="en-US" sz="1700" dirty="0">
+                <a:solidFill>
+                  <a:srgbClr val="000000"/>
+                </a:solidFill>
+                <a:latin typeface="Arial" pitchFamily="34" charset="0"/>
+                <a:ea typeface="Arial" pitchFamily="34" charset="-122"/>
+                <a:cs typeface="Arial" pitchFamily="34" charset="-120"/>
+              </a:rPr>
+              <a:t> is a weighting factor)</a:t>
+            </a:r>
+            <a:endParaRPr lang="en-US" sz="1700" dirty="0"/>
+          </a:p>
+        </p:txBody>
+      </p:sp>
+      <p:sp>
+        <p:nvSpPr>
+          <p:cNvPr id="29" name="Shape 25"/>
+          <p:cNvSpPr/>
+          <p:nvPr/>
+        </p:nvSpPr>
+        <p:spPr>
+          <a:xfrm>
+            <a:off x="1143000" y="4406900"/>
+            <a:ext cx="7302500" cy="571500"/>
+          </a:xfrm>
+          <a:prstGeom prst="rect">
+            <a:avLst/>
+          </a:prstGeom>
+          <a:solidFill>
+            <a:srgbClr val="F9DEC1"/>
+          </a:solidFill>
+          <a:ln/>
+        </p:spPr>
+      </p:sp>
+      <p:sp>
+        <p:nvSpPr>
+          <p:cNvPr id="30" name="Shape 26"/>
+          <p:cNvSpPr/>
+          <p:nvPr/>
+        </p:nvSpPr>
+        <p:spPr>
+          <a:xfrm>
+            <a:off x="1143000" y="4406900"/>
+            <a:ext cx="7302500" cy="38100"/>
+          </a:xfrm>
+          <a:prstGeom prst="rect">
+            <a:avLst/>
+          </a:prstGeom>
+          <a:solidFill>
+            <a:srgbClr val="8F1220"/>
+          </a:solidFill>
+          <a:ln/>
+        </p:spPr>
+      </p:sp>
+      <p:sp>
+        <p:nvSpPr>
+          <p:cNvPr id="31" name="Shape 27"/>
+          <p:cNvSpPr/>
+          <p:nvPr/>
+        </p:nvSpPr>
+        <p:spPr>
+          <a:xfrm>
+            <a:off x="1143000" y="4940300"/>
+            <a:ext cx="7302500" cy="38100"/>
+          </a:xfrm>
+          <a:prstGeom prst="rect">
+            <a:avLst/>
+          </a:prstGeom>
+          <a:solidFill>
+            <a:srgbClr val="8F1220"/>
+          </a:solidFill>
+          <a:ln/>
+        </p:spPr>
+      </p:sp>
+      <p:sp>
+        <p:nvSpPr>
+          <p:cNvPr id="32" name="Text 28"/>
+          <p:cNvSpPr/>
+          <p:nvPr/>
+        </p:nvSpPr>
+        <p:spPr>
+          <a:xfrm>
+            <a:off x="1371600" y="4445000"/>
+            <a:ext cx="6845300" cy="495300"/>
+          </a:xfrm>
+          <a:prstGeom prst="rect">
+            <a:avLst/>
+          </a:prstGeom>
+          <a:noFill/>
+          <a:ln/>
+        </p:spPr>
+        <p:txBody>
+          <a:bodyPr wrap="square" lIns="0" tIns="0" rIns="0" bIns="0" rtlCol="0" anchor="ctr"/>
+          <a:lstStyle/>
+          <a:p>
+            <a:pPr algn="l" indent="0" marL="0">
+              <a:lnSpc>
+                <a:spcPts val="2000"/>
+              </a:lnSpc>
+              <a:buNone/>
+            </a:pPr>
+            <a:r>
+              <a:rPr lang="en-US" sz="1700" dirty="0">
+                <a:solidFill>
+                  <a:srgbClr val="000000"/>
+                </a:solidFill>
+                <a:latin typeface="Arial" pitchFamily="34" charset="0"/>
+                <a:ea typeface="Arial" pitchFamily="34" charset="-122"/>
+                <a:cs typeface="Arial" pitchFamily="34" charset="-120"/>
+              </a:rPr>
+              <a:t>Define </a:t>
+            </a:r>
+            <a:pPr algn="l" indent="0" marL="0">
+              <a:lnSpc>
+                <a:spcPts val="2000"/>
+              </a:lnSpc>
+              <a:buNone/>
+            </a:pPr>
+            <a:r>
+              <a:rPr lang="en-US" sz="1700" b="1" dirty="0">
+                <a:solidFill>
+                  <a:srgbClr val="B60007"/>
+                </a:solidFill>
+                <a:latin typeface="Arial" pitchFamily="34" charset="0"/>
+                <a:ea typeface="Arial" pitchFamily="34" charset="-122"/>
+                <a:cs typeface="Arial" pitchFamily="34" charset="-120"/>
+              </a:rPr>
+              <a:t>Loss</a:t>
+            </a:r>
+            <a:pPr algn="l" indent="0" marL="0">
+              <a:lnSpc>
+                <a:spcPts val="2000"/>
+              </a:lnSpc>
+              <a:buNone/>
+            </a:pPr>
+            <a:r>
+              <a:rPr lang="en-US" sz="1700" dirty="0">
+                <a:solidFill>
+                  <a:srgbClr val="000000"/>
+                </a:solidFill>
+                <a:latin typeface="Arial" pitchFamily="34" charset="0"/>
+                <a:ea typeface="Arial" pitchFamily="34" charset="-122"/>
+                <a:cs typeface="Arial" pitchFamily="34" charset="-120"/>
+              </a:rPr>
+              <a:t> function as </a:t>
+            </a:r>
+            <a:pPr algn="l" indent="0" marL="0">
+              <a:lnSpc>
+                <a:spcPts val="2000"/>
+              </a:lnSpc>
+              <a:buNone/>
+            </a:pPr>
+            <a:r>
+              <a:rPr lang="en-US" sz="1700" b="1" dirty="0">
+                <a:solidFill>
+                  <a:srgbClr val="5D44AC"/>
+                </a:solidFill>
+                <a:latin typeface="Arial" pitchFamily="34" charset="0"/>
+                <a:ea typeface="Arial" pitchFamily="34" charset="-122"/>
+                <a:cs typeface="Arial" pitchFamily="34" charset="-120"/>
+              </a:rPr>
+              <a:t>squared distance</a:t>
+            </a:r>
+            <a:pPr algn="l" indent="0" marL="0">
+              <a:lnSpc>
+                <a:spcPts val="2000"/>
+              </a:lnSpc>
+              <a:buNone/>
+            </a:pPr>
+            <a:r>
+              <a:rPr lang="en-US" sz="1700" dirty="0">
+                <a:solidFill>
+                  <a:srgbClr val="000000"/>
+                </a:solidFill>
+                <a:latin typeface="Arial" pitchFamily="34" charset="0"/>
+                <a:ea typeface="Arial" pitchFamily="34" charset="-122"/>
+                <a:cs typeface="Arial" pitchFamily="34" charset="-120"/>
+              </a:rPr>
+              <a:t> between </a:t>
+            </a:r>
+            <a:pPr algn="l" indent="0" marL="0">
+              <a:lnSpc>
+                <a:spcPts val="2000"/>
+              </a:lnSpc>
+              <a:buNone/>
+            </a:pPr>
+            <a:r>
+              <a:rPr lang="en-US" sz="1700" b="1" i="1" u="sng" dirty="0">
+                <a:solidFill>
+                  <a:srgbClr val="000000"/>
+                </a:solidFill>
+                <a:latin typeface="Arial" pitchFamily="34" charset="0"/>
+                <a:ea typeface="Arial" pitchFamily="34" charset="-122"/>
+                <a:cs typeface="Arial" pitchFamily="34" charset="-120"/>
+              </a:rPr>
+              <a:t>Ŷ</a:t>
+            </a:r>
+            <a:pPr algn="l" indent="0" marL="0">
+              <a:lnSpc>
+                <a:spcPts val="2000"/>
+              </a:lnSpc>
+              <a:buNone/>
+            </a:pPr>
+            <a:r>
+              <a:rPr lang="en-US" sz="1700" dirty="0">
+                <a:solidFill>
+                  <a:srgbClr val="000000"/>
+                </a:solidFill>
+                <a:latin typeface="Arial" pitchFamily="34" charset="0"/>
+                <a:ea typeface="Arial" pitchFamily="34" charset="-122"/>
+                <a:cs typeface="Arial" pitchFamily="34" charset="-120"/>
+              </a:rPr>
+              <a:t> and </a:t>
+            </a:r>
+            <a:pPr algn="l" indent="0" marL="0">
+              <a:lnSpc>
+                <a:spcPts val="2000"/>
+              </a:lnSpc>
+              <a:buNone/>
+            </a:pPr>
+            <a:r>
+              <a:rPr lang="en-US" sz="1700" b="1" i="1" u="sng" dirty="0">
+                <a:solidFill>
+                  <a:srgbClr val="000000"/>
+                </a:solidFill>
+                <a:latin typeface="Arial" pitchFamily="34" charset="0"/>
+                <a:ea typeface="Arial" pitchFamily="34" charset="-122"/>
+                <a:cs typeface="Arial" pitchFamily="34" charset="-120"/>
+              </a:rPr>
+              <a:t>Y</a:t>
+            </a:r>
+            <a:endParaRPr lang="en-US" sz="1700" dirty="0"/>
+          </a:p>
+        </p:txBody>
+      </p:sp>
+      <p:sp>
+        <p:nvSpPr>
+          <p:cNvPr id="33" name="Shape 29"/>
+          <p:cNvSpPr/>
+          <p:nvPr/>
+        </p:nvSpPr>
+        <p:spPr>
+          <a:xfrm>
+            <a:off x="1130300" y="5067300"/>
+            <a:ext cx="4851400" cy="622300"/>
+          </a:xfrm>
+          <a:prstGeom prst="rect">
+            <a:avLst/>
+          </a:prstGeom>
+          <a:solidFill>
+            <a:srgbClr val="F9DFC8"/>
+          </a:solidFill>
+          <a:ln w="19050">
+            <a:solidFill>
+              <a:srgbClr val="742C2D"/>
+            </a:solidFill>
+            <a:prstDash val="solid"/>
+          </a:ln>
+        </p:spPr>
+      </p:sp>
+      <p:sp>
+        <p:nvSpPr>
+          <p:cNvPr id="34" name="Shape 30"/>
+          <p:cNvSpPr/>
+          <p:nvPr/>
+        </p:nvSpPr>
+        <p:spPr>
+          <a:xfrm>
+            <a:off x="6769100" y="5067300"/>
+            <a:ext cx="4406900" cy="622300"/>
+          </a:xfrm>
+          <a:prstGeom prst="rect">
+            <a:avLst/>
+          </a:prstGeom>
+          <a:solidFill>
+            <a:srgbClr val="F9FEDE"/>
+          </a:solidFill>
+          <a:ln w="19050">
+            <a:solidFill>
+              <a:srgbClr val="1E0060"/>
+            </a:solidFill>
+            <a:prstDash val="solid"/>
+          </a:ln>
+        </p:spPr>
+      </p:sp>
+      <p:sp>
+        <p:nvSpPr>
+          <p:cNvPr id="35" name="Text 31"/>
+          <p:cNvSpPr/>
+          <p:nvPr/>
+        </p:nvSpPr>
+        <p:spPr>
+          <a:xfrm>
+            <a:off x="1267460" y="5140452"/>
+            <a:ext cx="4577080" cy="475996"/>
+          </a:xfrm>
+          <a:prstGeom prst="rect">
+            <a:avLst/>
+          </a:prstGeom>
+          <a:noFill/>
+          <a:ln/>
+        </p:spPr>
+        <p:txBody>
+          <a:bodyPr wrap="square" lIns="0" tIns="0" rIns="0" bIns="0" rtlCol="0" anchor="ctr"/>
+          <a:lstStyle/>
+          <a:p>
+            <a:pPr algn="l" indent="0" marL="0">
+              <a:lnSpc>
+                <a:spcPts val="2000"/>
+              </a:lnSpc>
+              <a:buNone/>
+            </a:pPr>
+            <a:r>
+              <a:rPr lang="en-US" sz="1700" b="1" dirty="0">
+                <a:solidFill>
+                  <a:srgbClr val="1E0060"/>
+                </a:solidFill>
+                <a:latin typeface="Arial" pitchFamily="34" charset="0"/>
+                <a:ea typeface="Arial" pitchFamily="34" charset="-122"/>
+                <a:cs typeface="Arial" pitchFamily="34" charset="-120"/>
+              </a:rPr>
+              <a:t>Loss Term</a:t>
+            </a:r>
+            <a:pPr algn="l" indent="0" marL="0">
+              <a:lnSpc>
+                <a:spcPts val="2000"/>
+              </a:lnSpc>
+              <a:buNone/>
+            </a:pPr>
+            <a:r>
+              <a:rPr lang="en-US" sz="1700" dirty="0">
+                <a:solidFill>
+                  <a:srgbClr val="000000"/>
+                </a:solidFill>
+                <a:latin typeface="Arial" pitchFamily="34" charset="0"/>
+                <a:ea typeface="Arial" pitchFamily="34" charset="-122"/>
+                <a:cs typeface="Arial" pitchFamily="34" charset="-120"/>
+              </a:rPr>
+              <a:t> = </a:t>
+            </a:r>
+            <a:pPr algn="l" indent="0" marL="0">
+              <a:lnSpc>
+                <a:spcPts val="2000"/>
+              </a:lnSpc>
+              <a:buNone/>
+            </a:pPr>
+            <a:r>
+              <a:rPr lang="en-US" sz="1700" b="1" dirty="0">
+                <a:solidFill>
+                  <a:srgbClr val="C00000"/>
+                </a:solidFill>
+                <a:latin typeface="Arial" pitchFamily="34" charset="0"/>
+                <a:ea typeface="Arial" pitchFamily="34" charset="-122"/>
+                <a:cs typeface="Arial" pitchFamily="34" charset="-120"/>
+              </a:rPr>
+              <a:t>||Y-Ŷ||</a:t>
+            </a:r>
+            <a:pPr algn="l" indent="0" marL="0">
+              <a:lnSpc>
+                <a:spcPts val="2000"/>
+              </a:lnSpc>
+              <a:buNone/>
+            </a:pPr>
+            <a:r>
+              <a:rPr lang="en-US" sz="1700" baseline="30000" dirty="0">
+                <a:solidFill>
+                  <a:srgbClr val="C00000"/>
+                </a:solidFill>
+                <a:latin typeface="Arial" pitchFamily="34" charset="0"/>
+                <a:ea typeface="Arial" pitchFamily="34" charset="-122"/>
+                <a:cs typeface="Arial" pitchFamily="34" charset="-120"/>
+              </a:rPr>
+              <a:t>2</a:t>
+            </a:r>
+            <a:pPr algn="l" indent="0" marL="0">
+              <a:lnSpc>
+                <a:spcPts val="2000"/>
+              </a:lnSpc>
+              <a:buNone/>
+            </a:pPr>
+            <a:r>
+              <a:rPr lang="en-US" sz="1700" b="1" dirty="0">
+                <a:solidFill>
+                  <a:srgbClr val="C00000"/>
+                </a:solidFill>
+                <a:latin typeface="Arial" pitchFamily="34" charset="0"/>
+                <a:ea typeface="Arial" pitchFamily="34" charset="-122"/>
+                <a:cs typeface="Arial" pitchFamily="34" charset="-120"/>
+              </a:rPr>
+              <a:t> = (Y-Ŷ)</a:t>
+            </a:r>
+            <a:pPr algn="l" indent="0" marL="0">
+              <a:lnSpc>
+                <a:spcPts val="2000"/>
+              </a:lnSpc>
+              <a:buNone/>
+            </a:pPr>
+            <a:r>
+              <a:rPr lang="en-US" sz="1700" baseline="30000" dirty="0">
+                <a:solidFill>
+                  <a:srgbClr val="C00000"/>
+                </a:solidFill>
+                <a:latin typeface="Arial" pitchFamily="34" charset="0"/>
+                <a:ea typeface="Arial" pitchFamily="34" charset="-122"/>
+                <a:cs typeface="Arial" pitchFamily="34" charset="-120"/>
+              </a:rPr>
+              <a:t>T</a:t>
+            </a:r>
+            <a:pPr algn="l" indent="0" marL="0">
+              <a:lnSpc>
+                <a:spcPts val="2000"/>
+              </a:lnSpc>
+              <a:buNone/>
+            </a:pPr>
+            <a:r>
+              <a:rPr lang="en-US" sz="1700" b="1" dirty="0">
+                <a:solidFill>
+                  <a:srgbClr val="C00000"/>
+                </a:solidFill>
+                <a:latin typeface="Arial" pitchFamily="34" charset="0"/>
+                <a:ea typeface="Arial" pitchFamily="34" charset="-122"/>
+                <a:cs typeface="Arial" pitchFamily="34" charset="-120"/>
+              </a:rPr>
+              <a:t>(Y-Ŷ)</a:t>
+            </a:r>
+            <a:endParaRPr lang="en-US" sz="1700" dirty="0"/>
+          </a:p>
+        </p:txBody>
+      </p:sp>
+      <p:sp>
+        <p:nvSpPr>
+          <p:cNvPr id="36" name="Text 32"/>
+          <p:cNvSpPr/>
+          <p:nvPr/>
+        </p:nvSpPr>
+        <p:spPr>
+          <a:xfrm>
+            <a:off x="6906260" y="5140452"/>
+            <a:ext cx="4132580" cy="475996"/>
+          </a:xfrm>
+          <a:prstGeom prst="rect">
+            <a:avLst/>
+          </a:prstGeom>
+          <a:noFill/>
+          <a:ln/>
+        </p:spPr>
+        <p:txBody>
+          <a:bodyPr wrap="square" lIns="0" tIns="0" rIns="0" bIns="0" rtlCol="0" anchor="ctr"/>
+          <a:lstStyle/>
+          <a:p>
+            <a:pPr algn="l" indent="0" marL="0">
+              <a:lnSpc>
+                <a:spcPts val="2000"/>
+              </a:lnSpc>
+              <a:buNone/>
+            </a:pPr>
+            <a:r>
+              <a:rPr lang="en-US" sz="1700" b="1" dirty="0">
+                <a:solidFill>
+                  <a:srgbClr val="1E0060"/>
+                </a:solidFill>
+                <a:latin typeface="Arial" pitchFamily="34" charset="0"/>
+                <a:ea typeface="Arial" pitchFamily="34" charset="-122"/>
+                <a:cs typeface="Arial" pitchFamily="34" charset="-120"/>
+              </a:rPr>
+              <a:t>Regularization Term</a:t>
+            </a:r>
+            <a:pPr algn="l" indent="0" marL="0">
+              <a:lnSpc>
+                <a:spcPts val="2000"/>
+              </a:lnSpc>
+              <a:buNone/>
+            </a:pPr>
+            <a:r>
+              <a:rPr lang="en-US" sz="1700" dirty="0">
+                <a:solidFill>
+                  <a:srgbClr val="000000"/>
+                </a:solidFill>
+                <a:latin typeface="Arial" pitchFamily="34" charset="0"/>
+                <a:ea typeface="Arial" pitchFamily="34" charset="-122"/>
+                <a:cs typeface="Arial" pitchFamily="34" charset="-120"/>
+              </a:rPr>
+              <a:t> R = ||W||</a:t>
+            </a:r>
+            <a:pPr algn="l" indent="0" marL="0">
+              <a:lnSpc>
+                <a:spcPts val="2000"/>
+              </a:lnSpc>
+              <a:buNone/>
+            </a:pPr>
+            <a:r>
+              <a:rPr lang="en-US" sz="1700" baseline="30000" dirty="0">
+                <a:solidFill>
+                  <a:srgbClr val="000000"/>
+                </a:solidFill>
+                <a:latin typeface="Arial" pitchFamily="34" charset="0"/>
+                <a:ea typeface="Arial" pitchFamily="34" charset="-122"/>
+                <a:cs typeface="Arial" pitchFamily="34" charset="-120"/>
+              </a:rPr>
+              <a:t>2</a:t>
+            </a:r>
+            <a:pPr algn="l" indent="0" marL="0">
+              <a:lnSpc>
+                <a:spcPts val="2000"/>
+              </a:lnSpc>
+              <a:buNone/>
+            </a:pPr>
+            <a:r>
+              <a:rPr lang="en-US" sz="1700" dirty="0">
+                <a:solidFill>
+                  <a:srgbClr val="000000"/>
+                </a:solidFill>
+                <a:latin typeface="Arial" pitchFamily="34" charset="0"/>
+                <a:ea typeface="Arial" pitchFamily="34" charset="-122"/>
+                <a:cs typeface="Arial" pitchFamily="34" charset="-120"/>
+              </a:rPr>
+              <a:t> = </a:t>
+            </a:r>
+            <a:pPr algn="l" indent="0" marL="0">
+              <a:lnSpc>
+                <a:spcPts val="2000"/>
+              </a:lnSpc>
+              <a:buNone/>
+            </a:pPr>
+            <a:r>
+              <a:rPr lang="en-US" sz="1700" b="1" dirty="0">
+                <a:solidFill>
+                  <a:srgbClr val="008000"/>
+                </a:solidFill>
+                <a:latin typeface="Arial" pitchFamily="34" charset="0"/>
+                <a:ea typeface="Arial" pitchFamily="34" charset="-122"/>
+                <a:cs typeface="Arial" pitchFamily="34" charset="-120"/>
+              </a:rPr>
+              <a:t>W</a:t>
+            </a:r>
+            <a:pPr algn="l" indent="0" marL="0">
+              <a:lnSpc>
+                <a:spcPts val="2000"/>
+              </a:lnSpc>
+              <a:buNone/>
+            </a:pPr>
+            <a:r>
+              <a:rPr lang="en-US" sz="1700" baseline="30000" dirty="0">
+                <a:solidFill>
+                  <a:srgbClr val="008000"/>
+                </a:solidFill>
+                <a:latin typeface="Arial" pitchFamily="34" charset="0"/>
+                <a:ea typeface="Arial" pitchFamily="34" charset="-122"/>
+                <a:cs typeface="Arial" pitchFamily="34" charset="-120"/>
+              </a:rPr>
+              <a:t>T</a:t>
+            </a:r>
+            <a:pPr algn="l" indent="0" marL="0">
+              <a:lnSpc>
+                <a:spcPts val="2000"/>
+              </a:lnSpc>
+              <a:buNone/>
+            </a:pPr>
+            <a:r>
+              <a:rPr lang="en-US" sz="1700" b="1" dirty="0">
+                <a:solidFill>
+                  <a:srgbClr val="008000"/>
+                </a:solidFill>
+                <a:latin typeface="Arial" pitchFamily="34" charset="0"/>
+                <a:ea typeface="Arial" pitchFamily="34" charset="-122"/>
+                <a:cs typeface="Arial" pitchFamily="34" charset="-120"/>
+              </a:rPr>
+              <a:t>W</a:t>
+            </a:r>
+            <a:endParaRPr lang="en-US" sz="1700" dirty="0"/>
+          </a:p>
+        </p:txBody>
+      </p:sp>
+      <p:sp>
+        <p:nvSpPr>
+          <p:cNvPr id="37" name="Shape 33"/>
+          <p:cNvSpPr/>
+          <p:nvPr/>
+        </p:nvSpPr>
+        <p:spPr>
+          <a:xfrm>
+            <a:off x="1104900" y="5956300"/>
+            <a:ext cx="10071100" cy="749300"/>
+          </a:xfrm>
+          <a:prstGeom prst="rect">
+            <a:avLst/>
+          </a:prstGeom>
+          <a:solidFill>
+            <a:srgbClr val="ECFFFD"/>
+          </a:solidFill>
+          <a:ln w="19050">
+            <a:solidFill>
+              <a:srgbClr val="1E0060"/>
+            </a:solidFill>
+            <a:prstDash val="solid"/>
+          </a:ln>
+        </p:spPr>
+      </p:sp>
+      <p:sp>
+        <p:nvSpPr>
+          <p:cNvPr id="38" name="Shape 34"/>
+          <p:cNvSpPr/>
+          <p:nvPr/>
+        </p:nvSpPr>
+        <p:spPr>
+          <a:xfrm>
+            <a:off x="1104900" y="5956300"/>
+            <a:ext cx="10071100" cy="38100"/>
+          </a:xfrm>
+          <a:prstGeom prst="rect">
+            <a:avLst/>
+          </a:prstGeom>
+          <a:solidFill>
+            <a:srgbClr val="1E0060"/>
+          </a:solidFill>
+          <a:ln/>
+        </p:spPr>
+      </p:sp>
+      <p:sp>
+        <p:nvSpPr>
+          <p:cNvPr id="39" name="Shape 35"/>
+          <p:cNvSpPr/>
+          <p:nvPr/>
+        </p:nvSpPr>
+        <p:spPr>
+          <a:xfrm>
+            <a:off x="1104900" y="6667500"/>
+            <a:ext cx="10071100" cy="38100"/>
+          </a:xfrm>
+          <a:prstGeom prst="rect">
+            <a:avLst/>
+          </a:prstGeom>
+          <a:solidFill>
+            <a:srgbClr val="1E0060"/>
+          </a:solidFill>
+          <a:ln/>
+        </p:spPr>
+      </p:sp>
+      <p:sp>
+        <p:nvSpPr>
+          <p:cNvPr id="40" name="Text 36"/>
+          <p:cNvSpPr/>
+          <p:nvPr/>
+        </p:nvSpPr>
+        <p:spPr>
+          <a:xfrm>
+            <a:off x="2110740" y="5994400"/>
+            <a:ext cx="2194560" cy="673100"/>
+          </a:xfrm>
+          <a:prstGeom prst="rect">
+            <a:avLst/>
+          </a:prstGeom>
+          <a:noFill/>
+          <a:ln/>
+        </p:spPr>
+        <p:txBody>
+          <a:bodyPr wrap="square" lIns="0" tIns="0" rIns="0" bIns="0" rtlCol="0" anchor="ctr"/>
+          <a:lstStyle/>
+          <a:p>
+            <a:pPr algn="l" indent="0" marL="0">
+              <a:lnSpc>
+                <a:spcPts val="2000"/>
+              </a:lnSpc>
+              <a:buNone/>
+            </a:pPr>
+            <a:r>
+              <a:rPr lang="en-US" sz="1700" dirty="0">
+                <a:solidFill>
+                  <a:srgbClr val="000000"/>
+                </a:solidFill>
+                <a:latin typeface="Arial" pitchFamily="34" charset="0"/>
+                <a:ea typeface="Arial" pitchFamily="34" charset="-122"/>
+                <a:cs typeface="Arial" pitchFamily="34" charset="-120"/>
+              </a:rPr>
+              <a:t>Objective function </a:t>
+            </a:r>
+            <a:endParaRPr lang="en-US" sz="1700" dirty="0"/>
+          </a:p>
+        </p:txBody>
+      </p:sp>
+      <p:pic>
+        <p:nvPicPr>
+          <p:cNvPr id="41" name="Image 2" descr="videos/machine-learning/03_ridger_regression_gradient_descent/recreated_pptx/build/assets/eq_014_final.png">    </p:cNvPr>
+          <p:cNvPicPr>
+            <a:picLocks noChangeAspect="1"/>
+          </p:cNvPicPr>
+          <p:nvPr/>
+        </p:nvPicPr>
+        <p:blipFill>
+          <a:blip r:embed="rId3"/>
+          <a:stretch>
+            <a:fillRect/>
+          </a:stretch>
+        </p:blipFill>
+        <p:spPr>
+          <a:xfrm>
+            <a:off x="4445000" y="6083300"/>
+            <a:ext cx="3643884" cy="387066"/>
+          </a:xfrm>
+          <a:prstGeom prst="rect">
+            <a:avLst/>
+          </a:prstGeom>
+        </p:spPr>
+      </p:pic>
     </p:spTree>
   </p:cSld>
   <p:clrMapOvr>

--- a/videos/machine-learning/03_ridger_regression_gradient_descent/recreated_pptx/slide_014_recreated.pptx
+++ b/videos/machine-learning/03_ridger_regression_gradient_descent/recreated_pptx/slide_014_recreated.pptx
@@ -884,7 +884,7 @@
         <p:spPr>
           <a:xfrm>
             <a:off x="685800" y="571500"/>
-            <a:ext cx="10782300" cy="6286500"/>
+            <a:ext cx="10795000" cy="6286500"/>
           </a:xfrm>
           <a:prstGeom prst="rect">
             <a:avLst/>
@@ -903,16 +903,19 @@
         </p:nvSpPr>
         <p:spPr>
           <a:xfrm>
-            <a:off x="742950" y="571500"/>
-            <a:ext cx="12700" cy="6286500"/>
-          </a:xfrm>
-          <a:prstGeom prst="rect">
-            <a:avLst/>
-          </a:prstGeom>
-          <a:solidFill>
-            <a:srgbClr val="C00000"/>
-          </a:solidFill>
-          <a:ln/>
+            <a:off x="742950" y="584200"/>
+            <a:ext cx="0" cy="6261100"/>
+          </a:xfrm>
+          <a:prstGeom prst="line">
+            <a:avLst/>
+          </a:prstGeom>
+          <a:noFill/>
+          <a:ln w="12700">
+            <a:solidFill>
+              <a:srgbClr val="C00000"/>
+            </a:solidFill>
+            <a:prstDash val="solid"/>
+          </a:ln>
         </p:spPr>
       </p:sp>
       <p:sp>
@@ -923,16 +926,19 @@
         </p:nvSpPr>
         <p:spPr>
           <a:xfrm>
-            <a:off x="11442700" y="571500"/>
-            <a:ext cx="12700" cy="6286500"/>
-          </a:xfrm>
-          <a:prstGeom prst="rect">
-            <a:avLst/>
-          </a:prstGeom>
-          <a:solidFill>
-            <a:srgbClr val="C00000"/>
-          </a:solidFill>
-          <a:ln/>
+            <a:off x="11442700" y="584200"/>
+            <a:ext cx="0" cy="6261100"/>
+          </a:xfrm>
+          <a:prstGeom prst="line">
+            <a:avLst/>
+          </a:prstGeom>
+          <a:noFill/>
+          <a:ln w="12700">
+            <a:solidFill>
+              <a:srgbClr val="C00000"/>
+            </a:solidFill>
+            <a:prstDash val="solid"/>
+          </a:ln>
         </p:spPr>
       </p:sp>
       <p:sp>
@@ -943,16 +949,19 @@
         </p:nvSpPr>
         <p:spPr>
           <a:xfrm>
-            <a:off x="685800" y="6838950"/>
-            <a:ext cx="10782300" cy="12700"/>
-          </a:xfrm>
-          <a:prstGeom prst="rect">
-            <a:avLst/>
-          </a:prstGeom>
-          <a:solidFill>
-            <a:srgbClr val="C00000"/>
-          </a:solidFill>
-          <a:ln/>
+            <a:off x="736600" y="6838950"/>
+            <a:ext cx="10718800" cy="0"/>
+          </a:xfrm>
+          <a:prstGeom prst="line">
+            <a:avLst/>
+          </a:prstGeom>
+          <a:noFill/>
+          <a:ln w="12700">
+            <a:solidFill>
+              <a:srgbClr val="C00000"/>
+            </a:solidFill>
+            <a:prstDash val="solid"/>
+          </a:ln>
         </p:spPr>
       </p:sp>
       <p:sp>
@@ -972,7 +981,7 @@
           <a:solidFill>
             <a:srgbClr val="FDFD96"/>
           </a:solidFill>
-          <a:ln w="12700">
+          <a:ln w="25400">
             <a:solidFill>
               <a:srgbClr val="6A5ACD"/>
             </a:solidFill>
